--- a/TUIA_Segundo/2Cuatrimestre/4C_MachineLearning/Unidad 2_ Regresión Lineal/Clase 3 - Regresión Lineal.pptx
+++ b/TUIA_Segundo/2Cuatrimestre/4C_MachineLearning/Unidad 2_ Regresión Lineal/Clase 3 - Regresión Lineal.pptx
@@ -28,38 +28,37 @@
     <p:sldId id="273" r:id="rId23"/>
     <p:sldId id="274" r:id="rId24"/>
     <p:sldId id="275" r:id="rId25"/>
-    <p:sldId id="276" r:id="rId26"/>
   </p:sldIdLst>
   <p:sldSz cy="5143500" cx="9144000"/>
   <p:notesSz cx="6858000" cy="9144000"/>
   <p:embeddedFontLst>
     <p:embeddedFont>
       <p:font typeface="Raleway"/>
-      <p:regular r:id="rId27"/>
-      <p:bold r:id="rId28"/>
-      <p:italic r:id="rId29"/>
-      <p:boldItalic r:id="rId30"/>
+      <p:regular r:id="rId26"/>
+      <p:bold r:id="rId27"/>
+      <p:italic r:id="rId28"/>
+      <p:boldItalic r:id="rId29"/>
     </p:embeddedFont>
     <p:embeddedFont>
       <p:font typeface="Lato"/>
-      <p:regular r:id="rId31"/>
-      <p:bold r:id="rId32"/>
-      <p:italic r:id="rId33"/>
-      <p:boldItalic r:id="rId34"/>
+      <p:regular r:id="rId30"/>
+      <p:bold r:id="rId31"/>
+      <p:italic r:id="rId32"/>
+      <p:boldItalic r:id="rId33"/>
     </p:embeddedFont>
     <p:embeddedFont>
       <p:font typeface="Lora SemiBold"/>
-      <p:regular r:id="rId35"/>
-      <p:bold r:id="rId36"/>
-      <p:italic r:id="rId37"/>
-      <p:boldItalic r:id="rId38"/>
+      <p:regular r:id="rId34"/>
+      <p:bold r:id="rId35"/>
+      <p:italic r:id="rId36"/>
+      <p:boldItalic r:id="rId37"/>
     </p:embeddedFont>
     <p:embeddedFont>
       <p:font typeface="Lora"/>
-      <p:regular r:id="rId39"/>
-      <p:bold r:id="rId40"/>
-      <p:italic r:id="rId41"/>
-      <p:boldItalic r:id="rId42"/>
+      <p:regular r:id="rId38"/>
+      <p:bold r:id="rId39"/>
+      <p:italic r:id="rId40"/>
+      <p:boldItalic r:id="rId41"/>
     </p:embeddedFont>
   </p:embeddedFontLst>
   <p:defaultTextStyle>
@@ -88,7 +87,7 @@
         <a:srgbClr val="000000"/>
       </a:buClr>
       <a:buFont typeface="Arial"/>
-      <a:defRPr b="0" i="0" sz="1400" u="none" cap="none" strike="noStrike">
+      <a:defRPr b="0" i="0" spc="0" sz="1400" u="none" cap="none" strike="noStrike">
         <a:solidFill>
           <a:srgbClr val="000000"/>
         </a:solidFill>
@@ -112,7 +111,7 @@
         <a:srgbClr val="000000"/>
       </a:buClr>
       <a:buFont typeface="Arial"/>
-      <a:defRPr b="0" i="0" sz="1400" u="none" cap="none" strike="noStrike">
+      <a:defRPr b="0" i="0" spc="0" sz="1400" u="none" cap="none" strike="noStrike">
         <a:solidFill>
           <a:srgbClr val="000000"/>
         </a:solidFill>
@@ -136,7 +135,7 @@
         <a:srgbClr val="000000"/>
       </a:buClr>
       <a:buFont typeface="Arial"/>
-      <a:defRPr b="0" i="0" sz="1400" u="none" cap="none" strike="noStrike">
+      <a:defRPr b="0" i="0" spc="0" sz="1400" u="none" cap="none" strike="noStrike">
         <a:solidFill>
           <a:srgbClr val="000000"/>
         </a:solidFill>
@@ -160,7 +159,7 @@
         <a:srgbClr val="000000"/>
       </a:buClr>
       <a:buFont typeface="Arial"/>
-      <a:defRPr b="0" i="0" sz="1400" u="none" cap="none" strike="noStrike">
+      <a:defRPr b="0" i="0" spc="0" sz="1400" u="none" cap="none" strike="noStrike">
         <a:solidFill>
           <a:srgbClr val="000000"/>
         </a:solidFill>
@@ -184,7 +183,7 @@
         <a:srgbClr val="000000"/>
       </a:buClr>
       <a:buFont typeface="Arial"/>
-      <a:defRPr b="0" i="0" sz="1400" u="none" cap="none" strike="noStrike">
+      <a:defRPr b="0" i="0" spc="0" sz="1400" u="none" cap="none" strike="noStrike">
         <a:solidFill>
           <a:srgbClr val="000000"/>
         </a:solidFill>
@@ -208,7 +207,7 @@
         <a:srgbClr val="000000"/>
       </a:buClr>
       <a:buFont typeface="Arial"/>
-      <a:defRPr b="0" i="0" sz="1400" u="none" cap="none" strike="noStrike">
+      <a:defRPr b="0" i="0" spc="0" sz="1400" u="none" cap="none" strike="noStrike">
         <a:solidFill>
           <a:srgbClr val="000000"/>
         </a:solidFill>
@@ -232,7 +231,7 @@
         <a:srgbClr val="000000"/>
       </a:buClr>
       <a:buFont typeface="Arial"/>
-      <a:defRPr b="0" i="0" sz="1400" u="none" cap="none" strike="noStrike">
+      <a:defRPr b="0" i="0" spc="0" sz="1400" u="none" cap="none" strike="noStrike">
         <a:solidFill>
           <a:srgbClr val="000000"/>
         </a:solidFill>
@@ -256,7 +255,7 @@
         <a:srgbClr val="000000"/>
       </a:buClr>
       <a:buFont typeface="Arial"/>
-      <a:defRPr b="0" i="0" sz="1400" u="none" cap="none" strike="noStrike">
+      <a:defRPr b="0" i="0" spc="0" sz="1400" u="none" cap="none" strike="noStrike">
         <a:solidFill>
           <a:srgbClr val="000000"/>
         </a:solidFill>
@@ -280,7 +279,7 @@
         <a:srgbClr val="000000"/>
       </a:buClr>
       <a:buFont typeface="Arial"/>
-      <a:defRPr b="0" i="0" sz="1400" u="none" cap="none" strike="noStrike">
+      <a:defRPr b="0" i="0" spc="0" sz="1400" u="none" cap="none" strike="noStrike">
         <a:solidFill>
           <a:srgbClr val="000000"/>
         </a:solidFill>
@@ -307,7 +306,7 @@
       </p15:sldGuideLst>
     </p:ext>
     <p:ext uri="GoogleSlidesCustomDataVersion2">
-      <go:slidesCustomData xmlns:go="http://customooxmlschemas.google.com/" r:id="rId43" roundtripDataSignature="AMtx7mh6gRhma34IfwD3VKZLFz5mSqhbvw=="/>
+      <go:slidesCustomData xmlns:go="http://customooxmlschemas.google.com/" r:id="rId42" roundtripDataSignature="AMtx7mjUpfHl/oPotQvRmf5UTyEibu+8fA=="/>
     </p:ext>
   </p:extLst>
 </p:presentation>
@@ -668,7 +667,7 @@
         <a:srgbClr val="000000"/>
       </a:buClr>
       <a:buFont typeface="Arial"/>
-      <a:defRPr b="0" i="0" sz="1400" u="none" cap="none" strike="noStrike">
+      <a:defRPr b="0" i="0" spc="0" sz="1400" u="none" cap="none" strike="noStrike">
         <a:solidFill>
           <a:srgbClr val="000000"/>
         </a:solidFill>
@@ -692,7 +691,7 @@
         <a:srgbClr val="000000"/>
       </a:buClr>
       <a:buFont typeface="Arial"/>
-      <a:defRPr b="0" i="0" sz="1400" u="none" cap="none" strike="noStrike">
+      <a:defRPr b="0" i="0" spc="0" sz="1400" u="none" cap="none" strike="noStrike">
         <a:solidFill>
           <a:srgbClr val="000000"/>
         </a:solidFill>
@@ -716,7 +715,7 @@
         <a:srgbClr val="000000"/>
       </a:buClr>
       <a:buFont typeface="Arial"/>
-      <a:defRPr b="0" i="0" sz="1400" u="none" cap="none" strike="noStrike">
+      <a:defRPr b="0" i="0" spc="0" sz="1400" u="none" cap="none" strike="noStrike">
         <a:solidFill>
           <a:srgbClr val="000000"/>
         </a:solidFill>
@@ -740,7 +739,7 @@
         <a:srgbClr val="000000"/>
       </a:buClr>
       <a:buFont typeface="Arial"/>
-      <a:defRPr b="0" i="0" sz="1400" u="none" cap="none" strike="noStrike">
+      <a:defRPr b="0" i="0" spc="0" sz="1400" u="none" cap="none" strike="noStrike">
         <a:solidFill>
           <a:srgbClr val="000000"/>
         </a:solidFill>
@@ -764,7 +763,7 @@
         <a:srgbClr val="000000"/>
       </a:buClr>
       <a:buFont typeface="Arial"/>
-      <a:defRPr b="0" i="0" sz="1400" u="none" cap="none" strike="noStrike">
+      <a:defRPr b="0" i="0" spc="0" sz="1400" u="none" cap="none" strike="noStrike">
         <a:solidFill>
           <a:srgbClr val="000000"/>
         </a:solidFill>
@@ -788,7 +787,7 @@
         <a:srgbClr val="000000"/>
       </a:buClr>
       <a:buFont typeface="Arial"/>
-      <a:defRPr b="0" i="0" sz="1400" u="none" cap="none" strike="noStrike">
+      <a:defRPr b="0" i="0" spc="0" sz="1400" u="none" cap="none" strike="noStrike">
         <a:solidFill>
           <a:srgbClr val="000000"/>
         </a:solidFill>
@@ -812,7 +811,7 @@
         <a:srgbClr val="000000"/>
       </a:buClr>
       <a:buFont typeface="Arial"/>
-      <a:defRPr b="0" i="0" sz="1400" u="none" cap="none" strike="noStrike">
+      <a:defRPr b="0" i="0" spc="0" sz="1400" u="none" cap="none" strike="noStrike">
         <a:solidFill>
           <a:srgbClr val="000000"/>
         </a:solidFill>
@@ -836,7 +835,7 @@
         <a:srgbClr val="000000"/>
       </a:buClr>
       <a:buFont typeface="Arial"/>
-      <a:defRPr b="0" i="0" sz="1400" u="none" cap="none" strike="noStrike">
+      <a:defRPr b="0" i="0" spc="0" sz="1400" u="none" cap="none" strike="noStrike">
         <a:solidFill>
           <a:srgbClr val="000000"/>
         </a:solidFill>
@@ -860,7 +859,7 @@
         <a:srgbClr val="000000"/>
       </a:buClr>
       <a:buFont typeface="Arial"/>
-      <a:defRPr b="0" i="0" sz="1400" u="none" cap="none" strike="noStrike">
+      <a:defRPr b="0" i="0" spc="0" sz="1400" u="none" cap="none" strike="noStrike">
         <a:solidFill>
           <a:srgbClr val="000000"/>
         </a:solidFill>
@@ -996,7 +995,7 @@
   <p:cSld>
     <p:spTree>
       <p:nvGrpSpPr>
-        <p:cNvPr id="143" name="Shape 143"/>
+        <p:cNvPr id="140" name="Shape 140"/>
         <p:cNvGrpSpPr/>
         <p:nvPr/>
       </p:nvGrpSpPr>
@@ -1010,7 +1009,7 @@
       </p:grpSpPr>
       <p:sp>
         <p:nvSpPr>
-          <p:cNvPr id="144" name="Google Shape;144;p10:notes"/>
+          <p:cNvPr id="141" name="Google Shape;141;p12:notes"/>
           <p:cNvSpPr/>
           <p:nvPr>
             <p:ph idx="2" type="sldImg"/>
@@ -1055,7 +1054,7 @@
       </p:sp>
       <p:sp>
         <p:nvSpPr>
-          <p:cNvPr id="145" name="Google Shape;145;p10:notes"/>
+          <p:cNvPr id="142" name="Google Shape;142;p12:notes"/>
           <p:cNvSpPr txBox="1"/>
           <p:nvPr>
             <p:ph idx="1" type="body"/>
@@ -1113,7 +1112,7 @@
   <p:cSld>
     <p:spTree>
       <p:nvGrpSpPr>
-        <p:cNvPr id="148" name="Shape 148"/>
+        <p:cNvPr id="149" name="Shape 149"/>
         <p:cNvGrpSpPr/>
         <p:nvPr/>
       </p:nvGrpSpPr>
@@ -1127,7 +1126,7 @@
       </p:grpSpPr>
       <p:sp>
         <p:nvSpPr>
-          <p:cNvPr id="149" name="Google Shape;149;p11:notes"/>
+          <p:cNvPr id="150" name="Google Shape;150;p13:notes"/>
           <p:cNvSpPr/>
           <p:nvPr>
             <p:ph idx="2" type="sldImg"/>
@@ -1172,7 +1171,7 @@
       </p:sp>
       <p:sp>
         <p:nvSpPr>
-          <p:cNvPr id="150" name="Google Shape;150;p11:notes"/>
+          <p:cNvPr id="151" name="Google Shape;151;p13:notes"/>
           <p:cNvSpPr txBox="1"/>
           <p:nvPr>
             <p:ph idx="1" type="body"/>
@@ -1230,7 +1229,7 @@
   <p:cSld>
     <p:spTree>
       <p:nvGrpSpPr>
-        <p:cNvPr id="153" name="Shape 153"/>
+        <p:cNvPr id="161" name="Shape 161"/>
         <p:cNvGrpSpPr/>
         <p:nvPr/>
       </p:nvGrpSpPr>
@@ -1244,7 +1243,7 @@
       </p:grpSpPr>
       <p:sp>
         <p:nvSpPr>
-          <p:cNvPr id="154" name="Google Shape;154;p12:notes"/>
+          <p:cNvPr id="162" name="Google Shape;162;p14:notes"/>
           <p:cNvSpPr/>
           <p:nvPr>
             <p:ph idx="2" type="sldImg"/>
@@ -1289,7 +1288,7 @@
       </p:sp>
       <p:sp>
         <p:nvSpPr>
-          <p:cNvPr id="155" name="Google Shape;155;p12:notes"/>
+          <p:cNvPr id="163" name="Google Shape;163;p14:notes"/>
           <p:cNvSpPr txBox="1"/>
           <p:nvPr>
             <p:ph idx="1" type="body"/>
@@ -1347,7 +1346,7 @@
   <p:cSld>
     <p:spTree>
       <p:nvGrpSpPr>
-        <p:cNvPr id="161" name="Shape 161"/>
+        <p:cNvPr id="170" name="Shape 170"/>
         <p:cNvGrpSpPr/>
         <p:nvPr/>
       </p:nvGrpSpPr>
@@ -1361,7 +1360,7 @@
       </p:grpSpPr>
       <p:sp>
         <p:nvSpPr>
-          <p:cNvPr id="162" name="Google Shape;162;p13:notes"/>
+          <p:cNvPr id="171" name="Google Shape;171;p15:notes"/>
           <p:cNvSpPr/>
           <p:nvPr>
             <p:ph idx="2" type="sldImg"/>
@@ -1406,7 +1405,7 @@
       </p:sp>
       <p:sp>
         <p:nvSpPr>
-          <p:cNvPr id="163" name="Google Shape;163;p13:notes"/>
+          <p:cNvPr id="172" name="Google Shape;172;p15:notes"/>
           <p:cNvSpPr txBox="1"/>
           <p:nvPr>
             <p:ph idx="1" type="body"/>
@@ -1464,7 +1463,7 @@
   <p:cSld>
     <p:spTree>
       <p:nvGrpSpPr>
-        <p:cNvPr id="173" name="Shape 173"/>
+        <p:cNvPr id="180" name="Shape 180"/>
         <p:cNvGrpSpPr/>
         <p:nvPr/>
       </p:nvGrpSpPr>
@@ -1478,7 +1477,7 @@
       </p:grpSpPr>
       <p:sp>
         <p:nvSpPr>
-          <p:cNvPr id="174" name="Google Shape;174;p14:notes"/>
+          <p:cNvPr id="181" name="Google Shape;181;g3f407d6dfef_0_5:notes"/>
           <p:cNvSpPr/>
           <p:nvPr>
             <p:ph idx="2" type="sldImg"/>
@@ -1523,7 +1522,7 @@
       </p:sp>
       <p:sp>
         <p:nvSpPr>
-          <p:cNvPr id="175" name="Google Shape;175;p14:notes"/>
+          <p:cNvPr id="182" name="Google Shape;182;g3f407d6dfef_0_5:notes"/>
           <p:cNvSpPr txBox="1"/>
           <p:nvPr>
             <p:ph idx="1" type="body"/>
@@ -1581,7 +1580,7 @@
   <p:cSld>
     <p:spTree>
       <p:nvGrpSpPr>
-        <p:cNvPr id="183" name="Shape 183"/>
+        <p:cNvPr id="191" name="Shape 191"/>
         <p:cNvGrpSpPr/>
         <p:nvPr/>
       </p:nvGrpSpPr>
@@ -1595,7 +1594,7 @@
       </p:grpSpPr>
       <p:sp>
         <p:nvSpPr>
-          <p:cNvPr id="184" name="Google Shape;184;p15:notes"/>
+          <p:cNvPr id="192" name="Google Shape;192;p16:notes"/>
           <p:cNvSpPr/>
           <p:nvPr>
             <p:ph idx="2" type="sldImg"/>
@@ -1640,7 +1639,7 @@
       </p:sp>
       <p:sp>
         <p:nvSpPr>
-          <p:cNvPr id="185" name="Google Shape;185;p15:notes"/>
+          <p:cNvPr id="193" name="Google Shape;193;p16:notes"/>
           <p:cNvSpPr txBox="1"/>
           <p:nvPr>
             <p:ph idx="1" type="body"/>
@@ -1698,7 +1697,7 @@
   <p:cSld>
     <p:spTree>
       <p:nvGrpSpPr>
-        <p:cNvPr id="190" name="Shape 190"/>
+        <p:cNvPr id="198" name="Shape 198"/>
         <p:cNvGrpSpPr/>
         <p:nvPr/>
       </p:nvGrpSpPr>
@@ -1712,7 +1711,7 @@
       </p:grpSpPr>
       <p:sp>
         <p:nvSpPr>
-          <p:cNvPr id="191" name="Google Shape;191;p16:notes"/>
+          <p:cNvPr id="199" name="Google Shape;199;g395883b0ceb_2_0:notes"/>
           <p:cNvSpPr/>
           <p:nvPr>
             <p:ph idx="2" type="sldImg"/>
@@ -1757,7 +1756,7 @@
       </p:sp>
       <p:sp>
         <p:nvSpPr>
-          <p:cNvPr id="192" name="Google Shape;192;p16:notes"/>
+          <p:cNvPr id="200" name="Google Shape;200;g395883b0ceb_2_0:notes"/>
           <p:cNvSpPr txBox="1"/>
           <p:nvPr>
             <p:ph idx="1" type="body"/>
@@ -1815,7 +1814,7 @@
   <p:cSld>
     <p:spTree>
       <p:nvGrpSpPr>
-        <p:cNvPr id="197" name="Shape 197"/>
+        <p:cNvPr id="203" name="Shape 203"/>
         <p:cNvGrpSpPr/>
         <p:nvPr/>
       </p:nvGrpSpPr>
@@ -1829,7 +1828,7 @@
       </p:grpSpPr>
       <p:sp>
         <p:nvSpPr>
-          <p:cNvPr id="198" name="Google Shape;198;g395883b0ceb_2_0:notes"/>
+          <p:cNvPr id="204" name="Google Shape;204;g395883b0ceb_2_4:notes"/>
           <p:cNvSpPr/>
           <p:nvPr>
             <p:ph idx="2" type="sldImg"/>
@@ -1874,7 +1873,7 @@
       </p:sp>
       <p:sp>
         <p:nvSpPr>
-          <p:cNvPr id="199" name="Google Shape;199;g395883b0ceb_2_0:notes"/>
+          <p:cNvPr id="205" name="Google Shape;205;g395883b0ceb_2_4:notes"/>
           <p:cNvSpPr txBox="1"/>
           <p:nvPr>
             <p:ph idx="1" type="body"/>
@@ -1932,7 +1931,7 @@
   <p:cSld>
     <p:spTree>
       <p:nvGrpSpPr>
-        <p:cNvPr id="202" name="Shape 202"/>
+        <p:cNvPr id="209" name="Shape 209"/>
         <p:cNvGrpSpPr/>
         <p:nvPr/>
       </p:nvGrpSpPr>
@@ -1946,7 +1945,7 @@
       </p:grpSpPr>
       <p:sp>
         <p:nvSpPr>
-          <p:cNvPr id="203" name="Google Shape;203;g395883b0ceb_2_4:notes"/>
+          <p:cNvPr id="210" name="Google Shape;210;g395883b0ceb_2_9:notes"/>
           <p:cNvSpPr/>
           <p:nvPr>
             <p:ph idx="2" type="sldImg"/>
@@ -1991,7 +1990,7 @@
       </p:sp>
       <p:sp>
         <p:nvSpPr>
-          <p:cNvPr id="204" name="Google Shape;204;g395883b0ceb_2_4:notes"/>
+          <p:cNvPr id="211" name="Google Shape;211;g395883b0ceb_2_9:notes"/>
           <p:cNvSpPr txBox="1"/>
           <p:nvPr>
             <p:ph idx="1" type="body"/>
@@ -2049,7 +2048,7 @@
   <p:cSld>
     <p:spTree>
       <p:nvGrpSpPr>
-        <p:cNvPr id="208" name="Shape 208"/>
+        <p:cNvPr id="215" name="Shape 215"/>
         <p:cNvGrpSpPr/>
         <p:nvPr/>
       </p:nvGrpSpPr>
@@ -2063,7 +2062,7 @@
       </p:grpSpPr>
       <p:sp>
         <p:nvSpPr>
-          <p:cNvPr id="209" name="Google Shape;209;g395883b0ceb_2_9:notes"/>
+          <p:cNvPr id="216" name="Google Shape;216;g395883b0ceb_2_14:notes"/>
           <p:cNvSpPr/>
           <p:nvPr>
             <p:ph idx="2" type="sldImg"/>
@@ -2108,7 +2107,7 @@
       </p:sp>
       <p:sp>
         <p:nvSpPr>
-          <p:cNvPr id="210" name="Google Shape;210;g395883b0ceb_2_9:notes"/>
+          <p:cNvPr id="217" name="Google Shape;217;g395883b0ceb_2_14:notes"/>
           <p:cNvSpPr txBox="1"/>
           <p:nvPr>
             <p:ph idx="1" type="body"/>
@@ -2283,7 +2282,7 @@
   <p:cSld>
     <p:spTree>
       <p:nvGrpSpPr>
-        <p:cNvPr id="214" name="Shape 214"/>
+        <p:cNvPr id="221" name="Shape 221"/>
         <p:cNvGrpSpPr/>
         <p:nvPr/>
       </p:nvGrpSpPr>
@@ -2297,7 +2296,7 @@
       </p:grpSpPr>
       <p:sp>
         <p:nvSpPr>
-          <p:cNvPr id="215" name="Google Shape;215;g395883b0ceb_2_14:notes"/>
+          <p:cNvPr id="222" name="Google Shape;222;g395883b0ceb_2_96:notes"/>
           <p:cNvSpPr/>
           <p:nvPr>
             <p:ph idx="2" type="sldImg"/>
@@ -2342,124 +2341,7 @@
       </p:sp>
       <p:sp>
         <p:nvSpPr>
-          <p:cNvPr id="216" name="Google Shape;216;g395883b0ceb_2_14:notes"/>
-          <p:cNvSpPr txBox="1"/>
-          <p:nvPr>
-            <p:ph idx="1" type="body"/>
-          </p:nvPr>
-        </p:nvSpPr>
-        <p:spPr>
-          <a:xfrm>
-            <a:off x="685800" y="4343400"/>
-            <a:ext cx="5486400" cy="4114800"/>
-          </a:xfrm>
-          <a:prstGeom prst="rect">
-            <a:avLst/>
-          </a:prstGeom>
-          <a:noFill/>
-          <a:ln>
-            <a:noFill/>
-          </a:ln>
-        </p:spPr>
-        <p:txBody>
-          <a:bodyPr anchorCtr="0" anchor="t" bIns="91425" lIns="91425" spcFirstLastPara="1" rIns="91425" wrap="square" tIns="91425">
-            <a:noAutofit/>
-          </a:bodyPr>
-          <a:lstStyle/>
-          <a:p>
-            <a:pPr indent="0" lvl="0" marL="0" rtl="0" algn="l">
-              <a:lnSpc>
-                <a:spcPct val="100000"/>
-              </a:lnSpc>
-              <a:spcBef>
-                <a:spcPts val="0"/>
-              </a:spcBef>
-              <a:spcAft>
-                <a:spcPts val="0"/>
-              </a:spcAft>
-              <a:buSzPts val="1100"/>
-              <a:buNone/>
-            </a:pPr>
-            <a:r>
-              <a:t/>
-            </a:r>
-            <a:endParaRPr/>
-          </a:p>
-        </p:txBody>
-      </p:sp>
-    </p:spTree>
-  </p:cSld>
-  <p:clrMapOvr>
-    <a:masterClrMapping/>
-  </p:clrMapOvr>
-</p:notes>
-</file>
-
-<file path=ppt/notesSlides/notesSlide21.xml><?xml version="1.0" encoding="utf-8"?>
-<p:notes xmlns:a="http://schemas.openxmlformats.org/drawingml/2006/main" xmlns:r="http://schemas.openxmlformats.org/officeDocument/2006/relationships" xmlns:mc="http://schemas.openxmlformats.org/markup-compatibility/2006" xmlns:mv="urn:schemas-microsoft-com:mac:vml" xmlns:p="http://schemas.openxmlformats.org/presentationml/2006/main" xmlns:c="http://schemas.openxmlformats.org/drawingml/2006/chart" xmlns:dgm="http://schemas.openxmlformats.org/drawingml/2006/diagram" xmlns:o="urn:schemas-microsoft-com:office:office" xmlns:v="urn:schemas-microsoft-com:vml" xmlns:pvml="urn:schemas-microsoft-com:office:powerpoint" xmlns:com="http://schemas.openxmlformats.org/drawingml/2006/compatibility" xmlns:p14="http://schemas.microsoft.com/office/powerpoint/2010/main" xmlns:p15="http://schemas.microsoft.com/office/powerpoint/2012/main" xmlns:ahyp="http://schemas.microsoft.com/office/drawing/2018/hyperlinkcolor" showMasterPhAnim="0" showMasterSp="0">
-  <p:cSld>
-    <p:spTree>
-      <p:nvGrpSpPr>
-        <p:cNvPr id="220" name="Shape 220"/>
-        <p:cNvGrpSpPr/>
-        <p:nvPr/>
-      </p:nvGrpSpPr>
-      <p:grpSpPr>
-        <a:xfrm>
-          <a:off x="0" y="0"/>
-          <a:ext cx="0" cy="0"/>
-          <a:chOff x="0" y="0"/>
-          <a:chExt cx="0" cy="0"/>
-        </a:xfrm>
-      </p:grpSpPr>
-      <p:sp>
-        <p:nvSpPr>
-          <p:cNvPr id="221" name="Google Shape;221;g395883b0ceb_2_96:notes"/>
-          <p:cNvSpPr/>
-          <p:nvPr>
-            <p:ph idx="2" type="sldImg"/>
-          </p:nvPr>
-        </p:nvSpPr>
-        <p:spPr>
-          <a:xfrm>
-            <a:off x="381300" y="685800"/>
-            <a:ext cx="6096000" cy="3429000"/>
-          </a:xfrm>
-          <a:custGeom>
-            <a:rect b="b" l="l" r="r" t="t"/>
-            <a:pathLst>
-              <a:path extrusionOk="0" h="120000" w="120000">
-                <a:moveTo>
-                  <a:pt x="0" y="0"/>
-                </a:moveTo>
-                <a:lnTo>
-                  <a:pt x="120000" y="0"/>
-                </a:lnTo>
-                <a:lnTo>
-                  <a:pt x="120000" y="120000"/>
-                </a:lnTo>
-                <a:lnTo>
-                  <a:pt x="0" y="120000"/>
-                </a:lnTo>
-                <a:close/>
-              </a:path>
-            </a:pathLst>
-          </a:custGeom>
-          <a:noFill/>
-          <a:ln cap="flat" cmpd="sng" w="9525">
-            <a:solidFill>
-              <a:srgbClr val="000000"/>
-            </a:solidFill>
-            <a:prstDash val="solid"/>
-            <a:round/>
-            <a:headEnd len="sm" w="sm" type="none"/>
-            <a:tailEnd len="sm" w="sm" type="none"/>
-          </a:ln>
-        </p:spPr>
-      </p:sp>
-      <p:sp>
-        <p:nvSpPr>
-          <p:cNvPr id="222" name="Google Shape;222;g395883b0ceb_2_96:notes"/>
+          <p:cNvPr id="223" name="Google Shape;223;g395883b0ceb_2_96:notes"/>
           <p:cNvSpPr txBox="1"/>
           <p:nvPr>
             <p:ph idx="1" type="body"/>
@@ -2765,7 +2647,7 @@
       </p:grpSpPr>
       <p:sp>
         <p:nvSpPr>
-          <p:cNvPr id="110" name="Google Shape;110;p5:notes"/>
+          <p:cNvPr id="110" name="Google Shape;110;p7:notes"/>
           <p:cNvSpPr/>
           <p:nvPr>
             <p:ph idx="2" type="sldImg"/>
@@ -2810,7 +2692,7 @@
       </p:sp>
       <p:sp>
         <p:nvSpPr>
-          <p:cNvPr id="111" name="Google Shape;111;p5:notes"/>
+          <p:cNvPr id="111" name="Google Shape;111;p7:notes"/>
           <p:cNvSpPr txBox="1"/>
           <p:nvPr>
             <p:ph idx="1" type="body"/>
@@ -2868,7 +2750,7 @@
   <p:cSld>
     <p:spTree>
       <p:nvGrpSpPr>
-        <p:cNvPr id="117" name="Shape 117"/>
+        <p:cNvPr id="116" name="Shape 116"/>
         <p:cNvGrpSpPr/>
         <p:nvPr/>
       </p:nvGrpSpPr>
@@ -2882,7 +2764,7 @@
       </p:grpSpPr>
       <p:sp>
         <p:nvSpPr>
-          <p:cNvPr id="118" name="Google Shape;118;p6:notes"/>
+          <p:cNvPr id="117" name="Google Shape;117;p8:notes"/>
           <p:cNvSpPr/>
           <p:nvPr>
             <p:ph idx="2" type="sldImg"/>
@@ -2927,7 +2809,7 @@
       </p:sp>
       <p:sp>
         <p:nvSpPr>
-          <p:cNvPr id="119" name="Google Shape;119;p6:notes"/>
+          <p:cNvPr id="118" name="Google Shape;118;p8:notes"/>
           <p:cNvSpPr txBox="1"/>
           <p:nvPr>
             <p:ph idx="1" type="body"/>
@@ -2985,7 +2867,7 @@
   <p:cSld>
     <p:spTree>
       <p:nvGrpSpPr>
-        <p:cNvPr id="125" name="Shape 125"/>
+        <p:cNvPr id="122" name="Shape 122"/>
         <p:cNvGrpSpPr/>
         <p:nvPr/>
       </p:nvGrpSpPr>
@@ -2999,7 +2881,7 @@
       </p:grpSpPr>
       <p:sp>
         <p:nvSpPr>
-          <p:cNvPr id="126" name="Google Shape;126;p7:notes"/>
+          <p:cNvPr id="123" name="Google Shape;123;p9:notes"/>
           <p:cNvSpPr/>
           <p:nvPr>
             <p:ph idx="2" type="sldImg"/>
@@ -3044,7 +2926,7 @@
       </p:sp>
       <p:sp>
         <p:nvSpPr>
-          <p:cNvPr id="127" name="Google Shape;127;p7:notes"/>
+          <p:cNvPr id="124" name="Google Shape;124;p9:notes"/>
           <p:cNvSpPr txBox="1"/>
           <p:nvPr>
             <p:ph idx="1" type="body"/>
@@ -3102,7 +2984,7 @@
   <p:cSld>
     <p:spTree>
       <p:nvGrpSpPr>
-        <p:cNvPr id="131" name="Shape 131"/>
+        <p:cNvPr id="128" name="Shape 128"/>
         <p:cNvGrpSpPr/>
         <p:nvPr/>
       </p:nvGrpSpPr>
@@ -3116,7 +2998,7 @@
       </p:grpSpPr>
       <p:sp>
         <p:nvSpPr>
-          <p:cNvPr id="132" name="Google Shape;132;p8:notes"/>
+          <p:cNvPr id="129" name="Google Shape;129;p10:notes"/>
           <p:cNvSpPr/>
           <p:nvPr>
             <p:ph idx="2" type="sldImg"/>
@@ -3161,7 +3043,7 @@
       </p:sp>
       <p:sp>
         <p:nvSpPr>
-          <p:cNvPr id="133" name="Google Shape;133;p8:notes"/>
+          <p:cNvPr id="130" name="Google Shape;130;p10:notes"/>
           <p:cNvSpPr txBox="1"/>
           <p:nvPr>
             <p:ph idx="1" type="body"/>
@@ -3219,7 +3101,7 @@
   <p:cSld>
     <p:spTree>
       <p:nvGrpSpPr>
-        <p:cNvPr id="137" name="Shape 137"/>
+        <p:cNvPr id="133" name="Shape 133"/>
         <p:cNvGrpSpPr/>
         <p:nvPr/>
       </p:nvGrpSpPr>
@@ -3233,7 +3115,7 @@
       </p:grpSpPr>
       <p:sp>
         <p:nvSpPr>
-          <p:cNvPr id="138" name="Google Shape;138;p9:notes"/>
+          <p:cNvPr id="134" name="Google Shape;134;p11:notes"/>
           <p:cNvSpPr/>
           <p:nvPr>
             <p:ph idx="2" type="sldImg"/>
@@ -3278,7 +3160,7 @@
       </p:sp>
       <p:sp>
         <p:nvSpPr>
-          <p:cNvPr id="139" name="Google Shape;139;p9:notes"/>
+          <p:cNvPr id="135" name="Google Shape;135;p11:notes"/>
           <p:cNvSpPr txBox="1"/>
           <p:nvPr>
             <p:ph idx="1" type="body"/>
@@ -12081,7 +11963,7 @@
           <a:srgbClr val="000000"/>
         </a:buClr>
         <a:buFont typeface="Arial"/>
-        <a:defRPr b="0" i="0" sz="1400" u="none" cap="none" strike="noStrike">
+        <a:defRPr b="0" i="0" spc="0" sz="1400" u="none" cap="none" strike="noStrike">
           <a:solidFill>
             <a:srgbClr val="000000"/>
           </a:solidFill>
@@ -12105,7 +11987,7 @@
           <a:srgbClr val="000000"/>
         </a:buClr>
         <a:buFont typeface="Arial"/>
-        <a:defRPr b="0" i="0" sz="1400" u="none" cap="none" strike="noStrike">
+        <a:defRPr b="0" i="0" spc="0" sz="1400" u="none" cap="none" strike="noStrike">
           <a:solidFill>
             <a:srgbClr val="000000"/>
           </a:solidFill>
@@ -12129,7 +12011,7 @@
           <a:srgbClr val="000000"/>
         </a:buClr>
         <a:buFont typeface="Arial"/>
-        <a:defRPr b="0" i="0" sz="1400" u="none" cap="none" strike="noStrike">
+        <a:defRPr b="0" i="0" spc="0" sz="1400" u="none" cap="none" strike="noStrike">
           <a:solidFill>
             <a:srgbClr val="000000"/>
           </a:solidFill>
@@ -12153,7 +12035,7 @@
           <a:srgbClr val="000000"/>
         </a:buClr>
         <a:buFont typeface="Arial"/>
-        <a:defRPr b="0" i="0" sz="1400" u="none" cap="none" strike="noStrike">
+        <a:defRPr b="0" i="0" spc="0" sz="1400" u="none" cap="none" strike="noStrike">
           <a:solidFill>
             <a:srgbClr val="000000"/>
           </a:solidFill>
@@ -12177,7 +12059,7 @@
           <a:srgbClr val="000000"/>
         </a:buClr>
         <a:buFont typeface="Arial"/>
-        <a:defRPr b="0" i="0" sz="1400" u="none" cap="none" strike="noStrike">
+        <a:defRPr b="0" i="0" spc="0" sz="1400" u="none" cap="none" strike="noStrike">
           <a:solidFill>
             <a:srgbClr val="000000"/>
           </a:solidFill>
@@ -12201,7 +12083,7 @@
           <a:srgbClr val="000000"/>
         </a:buClr>
         <a:buFont typeface="Arial"/>
-        <a:defRPr b="0" i="0" sz="1400" u="none" cap="none" strike="noStrike">
+        <a:defRPr b="0" i="0" spc="0" sz="1400" u="none" cap="none" strike="noStrike">
           <a:solidFill>
             <a:srgbClr val="000000"/>
           </a:solidFill>
@@ -12225,7 +12107,7 @@
           <a:srgbClr val="000000"/>
         </a:buClr>
         <a:buFont typeface="Arial"/>
-        <a:defRPr b="0" i="0" sz="1400" u="none" cap="none" strike="noStrike">
+        <a:defRPr b="0" i="0" spc="0" sz="1400" u="none" cap="none" strike="noStrike">
           <a:solidFill>
             <a:srgbClr val="000000"/>
           </a:solidFill>
@@ -12249,7 +12131,7 @@
           <a:srgbClr val="000000"/>
         </a:buClr>
         <a:buFont typeface="Arial"/>
-        <a:defRPr b="0" i="0" sz="1400" u="none" cap="none" strike="noStrike">
+        <a:defRPr b="0" i="0" spc="0" sz="1400" u="none" cap="none" strike="noStrike">
           <a:solidFill>
             <a:srgbClr val="000000"/>
           </a:solidFill>
@@ -12273,7 +12155,7 @@
           <a:srgbClr val="000000"/>
         </a:buClr>
         <a:buFont typeface="Arial"/>
-        <a:defRPr b="0" i="0" sz="1400" u="none" cap="none" strike="noStrike">
+        <a:defRPr b="0" i="0" spc="0" sz="1400" u="none" cap="none" strike="noStrike">
           <a:solidFill>
             <a:srgbClr val="000000"/>
           </a:solidFill>
@@ -12310,7 +12192,7 @@
           <a:srgbClr val="000000"/>
         </a:buClr>
         <a:buFont typeface="Arial"/>
-        <a:defRPr b="0" i="0" sz="1400" u="none" cap="none" strike="noStrike">
+        <a:defRPr b="0" i="0" spc="0" sz="1400" u="none" cap="none" strike="noStrike">
           <a:solidFill>
             <a:srgbClr val="000000"/>
           </a:solidFill>
@@ -12334,7 +12216,7 @@
           <a:srgbClr val="000000"/>
         </a:buClr>
         <a:buFont typeface="Arial"/>
-        <a:defRPr b="0" i="0" sz="1400" u="none" cap="none" strike="noStrike">
+        <a:defRPr b="0" i="0" spc="0" sz="1400" u="none" cap="none" strike="noStrike">
           <a:solidFill>
             <a:srgbClr val="000000"/>
           </a:solidFill>
@@ -12358,7 +12240,7 @@
           <a:srgbClr val="000000"/>
         </a:buClr>
         <a:buFont typeface="Arial"/>
-        <a:defRPr b="0" i="0" sz="1400" u="none" cap="none" strike="noStrike">
+        <a:defRPr b="0" i="0" spc="0" sz="1400" u="none" cap="none" strike="noStrike">
           <a:solidFill>
             <a:srgbClr val="000000"/>
           </a:solidFill>
@@ -12382,7 +12264,7 @@
           <a:srgbClr val="000000"/>
         </a:buClr>
         <a:buFont typeface="Arial"/>
-        <a:defRPr b="0" i="0" sz="1400" u="none" cap="none" strike="noStrike">
+        <a:defRPr b="0" i="0" spc="0" sz="1400" u="none" cap="none" strike="noStrike">
           <a:solidFill>
             <a:srgbClr val="000000"/>
           </a:solidFill>
@@ -12406,7 +12288,7 @@
           <a:srgbClr val="000000"/>
         </a:buClr>
         <a:buFont typeface="Arial"/>
-        <a:defRPr b="0" i="0" sz="1400" u="none" cap="none" strike="noStrike">
+        <a:defRPr b="0" i="0" spc="0" sz="1400" u="none" cap="none" strike="noStrike">
           <a:solidFill>
             <a:srgbClr val="000000"/>
           </a:solidFill>
@@ -12430,7 +12312,7 @@
           <a:srgbClr val="000000"/>
         </a:buClr>
         <a:buFont typeface="Arial"/>
-        <a:defRPr b="0" i="0" sz="1400" u="none" cap="none" strike="noStrike">
+        <a:defRPr b="0" i="0" spc="0" sz="1400" u="none" cap="none" strike="noStrike">
           <a:solidFill>
             <a:srgbClr val="000000"/>
           </a:solidFill>
@@ -12454,7 +12336,7 @@
           <a:srgbClr val="000000"/>
         </a:buClr>
         <a:buFont typeface="Arial"/>
-        <a:defRPr b="0" i="0" sz="1400" u="none" cap="none" strike="noStrike">
+        <a:defRPr b="0" i="0" spc="0" sz="1400" u="none" cap="none" strike="noStrike">
           <a:solidFill>
             <a:srgbClr val="000000"/>
           </a:solidFill>
@@ -12478,7 +12360,7 @@
           <a:srgbClr val="000000"/>
         </a:buClr>
         <a:buFont typeface="Arial"/>
-        <a:defRPr b="0" i="0" sz="1400" u="none" cap="none" strike="noStrike">
+        <a:defRPr b="0" i="0" spc="0" sz="1400" u="none" cap="none" strike="noStrike">
           <a:solidFill>
             <a:srgbClr val="000000"/>
           </a:solidFill>
@@ -12502,7 +12384,7 @@
           <a:srgbClr val="000000"/>
         </a:buClr>
         <a:buFont typeface="Arial"/>
-        <a:defRPr b="0" i="0" sz="1400" u="none" cap="none" strike="noStrike">
+        <a:defRPr b="0" i="0" spc="0" sz="1400" u="none" cap="none" strike="noStrike">
           <a:solidFill>
             <a:srgbClr val="000000"/>
           </a:solidFill>
@@ -12539,7 +12421,7 @@
           <a:srgbClr val="000000"/>
         </a:buClr>
         <a:buFont typeface="Arial"/>
-        <a:defRPr b="0" i="0" sz="1400" u="none" cap="none" strike="noStrike">
+        <a:defRPr b="0" i="0" spc="0" sz="1400" u="none" cap="none" strike="noStrike">
           <a:solidFill>
             <a:srgbClr val="000000"/>
           </a:solidFill>
@@ -12563,7 +12445,7 @@
           <a:srgbClr val="000000"/>
         </a:buClr>
         <a:buFont typeface="Arial"/>
-        <a:defRPr b="0" i="0" sz="1400" u="none" cap="none" strike="noStrike">
+        <a:defRPr b="0" i="0" spc="0" sz="1400" u="none" cap="none" strike="noStrike">
           <a:solidFill>
             <a:srgbClr val="000000"/>
           </a:solidFill>
@@ -12587,7 +12469,7 @@
           <a:srgbClr val="000000"/>
         </a:buClr>
         <a:buFont typeface="Arial"/>
-        <a:defRPr b="0" i="0" sz="1400" u="none" cap="none" strike="noStrike">
+        <a:defRPr b="0" i="0" spc="0" sz="1400" u="none" cap="none" strike="noStrike">
           <a:solidFill>
             <a:srgbClr val="000000"/>
           </a:solidFill>
@@ -12611,7 +12493,7 @@
           <a:srgbClr val="000000"/>
         </a:buClr>
         <a:buFont typeface="Arial"/>
-        <a:defRPr b="0" i="0" sz="1400" u="none" cap="none" strike="noStrike">
+        <a:defRPr b="0" i="0" spc="0" sz="1400" u="none" cap="none" strike="noStrike">
           <a:solidFill>
             <a:srgbClr val="000000"/>
           </a:solidFill>
@@ -12635,7 +12517,7 @@
           <a:srgbClr val="000000"/>
         </a:buClr>
         <a:buFont typeface="Arial"/>
-        <a:defRPr b="0" i="0" sz="1400" u="none" cap="none" strike="noStrike">
+        <a:defRPr b="0" i="0" spc="0" sz="1400" u="none" cap="none" strike="noStrike">
           <a:solidFill>
             <a:srgbClr val="000000"/>
           </a:solidFill>
@@ -12659,7 +12541,7 @@
           <a:srgbClr val="000000"/>
         </a:buClr>
         <a:buFont typeface="Arial"/>
-        <a:defRPr b="0" i="0" sz="1400" u="none" cap="none" strike="noStrike">
+        <a:defRPr b="0" i="0" spc="0" sz="1400" u="none" cap="none" strike="noStrike">
           <a:solidFill>
             <a:srgbClr val="000000"/>
           </a:solidFill>
@@ -12683,7 +12565,7 @@
           <a:srgbClr val="000000"/>
         </a:buClr>
         <a:buFont typeface="Arial"/>
-        <a:defRPr b="0" i="0" sz="1400" u="none" cap="none" strike="noStrike">
+        <a:defRPr b="0" i="0" spc="0" sz="1400" u="none" cap="none" strike="noStrike">
           <a:solidFill>
             <a:srgbClr val="000000"/>
           </a:solidFill>
@@ -12707,7 +12589,7 @@
           <a:srgbClr val="000000"/>
         </a:buClr>
         <a:buFont typeface="Arial"/>
-        <a:defRPr b="0" i="0" sz="1400" u="none" cap="none" strike="noStrike">
+        <a:defRPr b="0" i="0" spc="0" sz="1400" u="none" cap="none" strike="noStrike">
           <a:solidFill>
             <a:srgbClr val="000000"/>
           </a:solidFill>
@@ -12731,7 +12613,7 @@
           <a:srgbClr val="000000"/>
         </a:buClr>
         <a:buFont typeface="Arial"/>
-        <a:defRPr b="0" i="0" sz="1400" u="none" cap="none" strike="noStrike">
+        <a:defRPr b="0" i="0" spc="0" sz="1400" u="none" cap="none" strike="noStrike">
           <a:solidFill>
             <a:srgbClr val="000000"/>
           </a:solidFill>
@@ -12872,111 +12754,7 @@
   <p:cSld>
     <p:spTree>
       <p:nvGrpSpPr>
-        <p:cNvPr id="146" name="Shape 146"/>
-        <p:cNvGrpSpPr/>
-        <p:nvPr/>
-      </p:nvGrpSpPr>
-      <p:grpSpPr>
-        <a:xfrm>
-          <a:off x="0" y="0"/>
-          <a:ext cx="0" cy="0"/>
-          <a:chOff x="0" y="0"/>
-          <a:chExt cx="0" cy="0"/>
-        </a:xfrm>
-      </p:grpSpPr>
-      <p:pic>
-        <p:nvPicPr>
-          <p:cNvPr id="147" name="Google Shape;147;p10"/>
-          <p:cNvPicPr preferRelativeResize="0"/>
-          <p:nvPr/>
-        </p:nvPicPr>
-        <p:blipFill rotWithShape="1">
-          <a:blip r:embed="rId3">
-            <a:alphaModFix/>
-          </a:blip>
-          <a:srcRect b="0" l="0" r="0" t="0"/>
-          <a:stretch/>
-        </p:blipFill>
-        <p:spPr>
-          <a:xfrm>
-            <a:off x="1833611" y="624075"/>
-            <a:ext cx="5476775" cy="4351850"/>
-          </a:xfrm>
-          <a:prstGeom prst="rect">
-            <a:avLst/>
-          </a:prstGeom>
-          <a:noFill/>
-          <a:ln>
-            <a:noFill/>
-          </a:ln>
-        </p:spPr>
-      </p:pic>
-    </p:spTree>
-  </p:cSld>
-  <p:clrMapOvr>
-    <a:masterClrMapping/>
-  </p:clrMapOvr>
-</p:sld>
-</file>
-
-<file path=ppt/slides/slide11.xml><?xml version="1.0" encoding="utf-8"?>
-<p:sld xmlns:a="http://schemas.openxmlformats.org/drawingml/2006/main" xmlns:r="http://schemas.openxmlformats.org/officeDocument/2006/relationships" xmlns:mc="http://schemas.openxmlformats.org/markup-compatibility/2006" xmlns:mv="urn:schemas-microsoft-com:mac:vml" xmlns:p="http://schemas.openxmlformats.org/presentationml/2006/main" xmlns:c="http://schemas.openxmlformats.org/drawingml/2006/chart" xmlns:dgm="http://schemas.openxmlformats.org/drawingml/2006/diagram" xmlns:o="urn:schemas-microsoft-com:office:office" xmlns:v="urn:schemas-microsoft-com:vml" xmlns:pvml="urn:schemas-microsoft-com:office:powerpoint" xmlns:com="http://schemas.openxmlformats.org/drawingml/2006/compatibility" xmlns:p14="http://schemas.microsoft.com/office/powerpoint/2010/main" xmlns:p15="http://schemas.microsoft.com/office/powerpoint/2012/main" xmlns:ahyp="http://schemas.microsoft.com/office/drawing/2018/hyperlinkcolor">
-  <p:cSld>
-    <p:spTree>
-      <p:nvGrpSpPr>
-        <p:cNvPr id="151" name="Shape 151"/>
-        <p:cNvGrpSpPr/>
-        <p:nvPr/>
-      </p:nvGrpSpPr>
-      <p:grpSpPr>
-        <a:xfrm>
-          <a:off x="0" y="0"/>
-          <a:ext cx="0" cy="0"/>
-          <a:chOff x="0" y="0"/>
-          <a:chExt cx="0" cy="0"/>
-        </a:xfrm>
-      </p:grpSpPr>
-      <p:pic>
-        <p:nvPicPr>
-          <p:cNvPr id="152" name="Google Shape;152;p11"/>
-          <p:cNvPicPr preferRelativeResize="0"/>
-          <p:nvPr/>
-        </p:nvPicPr>
-        <p:blipFill rotWithShape="1">
-          <a:blip r:embed="rId3">
-            <a:alphaModFix/>
-          </a:blip>
-          <a:srcRect b="0" l="0" r="0" t="0"/>
-          <a:stretch/>
-        </p:blipFill>
-        <p:spPr>
-          <a:xfrm>
-            <a:off x="2238375" y="1092713"/>
-            <a:ext cx="4667250" cy="3667125"/>
-          </a:xfrm>
-          <a:prstGeom prst="rect">
-            <a:avLst/>
-          </a:prstGeom>
-          <a:noFill/>
-          <a:ln>
-            <a:noFill/>
-          </a:ln>
-        </p:spPr>
-      </p:pic>
-    </p:spTree>
-  </p:cSld>
-  <p:clrMapOvr>
-    <a:masterClrMapping/>
-  </p:clrMapOvr>
-</p:sld>
-</file>
-
-<file path=ppt/slides/slide12.xml><?xml version="1.0" encoding="utf-8"?>
-<p:sld xmlns:a="http://schemas.openxmlformats.org/drawingml/2006/main" xmlns:r="http://schemas.openxmlformats.org/officeDocument/2006/relationships" xmlns:mc="http://schemas.openxmlformats.org/markup-compatibility/2006" xmlns:mv="urn:schemas-microsoft-com:mac:vml" xmlns:p="http://schemas.openxmlformats.org/presentationml/2006/main" xmlns:c="http://schemas.openxmlformats.org/drawingml/2006/chart" xmlns:dgm="http://schemas.openxmlformats.org/drawingml/2006/diagram" xmlns:o="urn:schemas-microsoft-com:office:office" xmlns:v="urn:schemas-microsoft-com:vml" xmlns:pvml="urn:schemas-microsoft-com:office:powerpoint" xmlns:com="http://schemas.openxmlformats.org/drawingml/2006/compatibility" xmlns:p14="http://schemas.microsoft.com/office/powerpoint/2010/main" xmlns:p15="http://schemas.microsoft.com/office/powerpoint/2012/main" xmlns:ahyp="http://schemas.microsoft.com/office/drawing/2018/hyperlinkcolor">
-  <p:cSld>
-    <p:spTree>
-      <p:nvGrpSpPr>
-        <p:cNvPr id="156" name="Shape 156"/>
+        <p:cNvPr id="143" name="Shape 143"/>
         <p:cNvGrpSpPr/>
         <p:nvPr/>
       </p:nvGrpSpPr>
@@ -12990,7 +12768,7 @@
       </p:grpSpPr>
       <p:sp>
         <p:nvSpPr>
-          <p:cNvPr id="157" name="Google Shape;157;p12"/>
+          <p:cNvPr id="144" name="Google Shape;144;p12"/>
           <p:cNvSpPr txBox="1"/>
           <p:nvPr>
             <p:ph type="title"/>
@@ -13038,7 +12816,7 @@
       </p:sp>
       <p:sp>
         <p:nvSpPr>
-          <p:cNvPr id="158" name="Google Shape;158;p12"/>
+          <p:cNvPr id="145" name="Google Shape;145;p12"/>
           <p:cNvSpPr txBox="1"/>
           <p:nvPr>
             <p:ph idx="1" type="body"/>
@@ -13123,7 +12901,7 @@
       </p:sp>
       <p:pic>
         <p:nvPicPr>
-          <p:cNvPr id="159" name="Google Shape;159;p12"/>
+          <p:cNvPr id="146" name="Google Shape;146;p12"/>
           <p:cNvPicPr preferRelativeResize="0"/>
           <p:nvPr/>
         </p:nvPicPr>
@@ -13136,7 +12914,7 @@
         </p:blipFill>
         <p:spPr>
           <a:xfrm>
-            <a:off x="2619051" y="1964450"/>
+            <a:off x="266701" y="1909525"/>
             <a:ext cx="3909500" cy="2219175"/>
           </a:xfrm>
           <a:prstGeom prst="rect">
@@ -13150,7 +12928,7 @@
       </p:pic>
       <p:sp>
         <p:nvSpPr>
-          <p:cNvPr id="160" name="Google Shape;160;p12"/>
+          <p:cNvPr id="147" name="Google Shape;147;p12"/>
           <p:cNvSpPr txBox="1"/>
           <p:nvPr/>
         </p:nvSpPr>
@@ -13252,6 +13030,34 @@
           </a:p>
         </p:txBody>
       </p:sp>
+      <p:pic>
+        <p:nvPicPr>
+          <p:cNvPr id="148" name="Google Shape;148;p12" title="7fdeb56b-b6f2-4121-8f79-8aa856d1d862.png"/>
+          <p:cNvPicPr preferRelativeResize="0"/>
+          <p:nvPr/>
+        </p:nvPicPr>
+        <p:blipFill>
+          <a:blip r:embed="rId4">
+            <a:alphaModFix/>
+          </a:blip>
+          <a:stretch>
+            <a:fillRect/>
+          </a:stretch>
+        </p:blipFill>
+        <p:spPr>
+          <a:xfrm>
+            <a:off x="4105025" y="1527275"/>
+            <a:ext cx="4842852" cy="2725550"/>
+          </a:xfrm>
+          <a:prstGeom prst="rect">
+            <a:avLst/>
+          </a:prstGeom>
+          <a:noFill/>
+          <a:ln>
+            <a:noFill/>
+          </a:ln>
+        </p:spPr>
+      </p:pic>
     </p:spTree>
   </p:cSld>
   <p:clrMapOvr>
@@ -13260,12 +13066,12 @@
 </p:sld>
 </file>
 
-<file path=ppt/slides/slide13.xml><?xml version="1.0" encoding="utf-8"?>
+<file path=ppt/slides/slide11.xml><?xml version="1.0" encoding="utf-8"?>
 <p:sld xmlns:a="http://schemas.openxmlformats.org/drawingml/2006/main" xmlns:r="http://schemas.openxmlformats.org/officeDocument/2006/relationships" xmlns:mc="http://schemas.openxmlformats.org/markup-compatibility/2006" xmlns:mv="urn:schemas-microsoft-com:mac:vml" xmlns:p="http://schemas.openxmlformats.org/presentationml/2006/main" xmlns:c="http://schemas.openxmlformats.org/drawingml/2006/chart" xmlns:dgm="http://schemas.openxmlformats.org/drawingml/2006/diagram" xmlns:o="urn:schemas-microsoft-com:office:office" xmlns:v="urn:schemas-microsoft-com:vml" xmlns:pvml="urn:schemas-microsoft-com:office:powerpoint" xmlns:com="http://schemas.openxmlformats.org/drawingml/2006/compatibility" xmlns:p14="http://schemas.microsoft.com/office/powerpoint/2010/main" xmlns:p15="http://schemas.microsoft.com/office/powerpoint/2012/main" xmlns:ahyp="http://schemas.microsoft.com/office/drawing/2018/hyperlinkcolor">
   <p:cSld>
     <p:spTree>
       <p:nvGrpSpPr>
-        <p:cNvPr id="164" name="Shape 164"/>
+        <p:cNvPr id="152" name="Shape 152"/>
         <p:cNvGrpSpPr/>
         <p:nvPr/>
       </p:nvGrpSpPr>
@@ -13279,7 +13085,7 @@
       </p:grpSpPr>
       <p:sp>
         <p:nvSpPr>
-          <p:cNvPr id="165" name="Google Shape;165;p13"/>
+          <p:cNvPr id="153" name="Google Shape;153;p13"/>
           <p:cNvSpPr txBox="1"/>
           <p:nvPr/>
         </p:nvSpPr>
@@ -13595,7 +13401,7 @@
       </p:sp>
       <p:sp>
         <p:nvSpPr>
-          <p:cNvPr id="166" name="Google Shape;166;p13"/>
+          <p:cNvPr id="154" name="Google Shape;154;p13"/>
           <p:cNvSpPr txBox="1"/>
           <p:nvPr/>
         </p:nvSpPr>
@@ -13692,7 +13498,7 @@
       </p:sp>
       <p:sp>
         <p:nvSpPr>
-          <p:cNvPr id="167" name="Google Shape;167;p13"/>
+          <p:cNvPr id="155" name="Google Shape;155;p13"/>
           <p:cNvSpPr txBox="1"/>
           <p:nvPr/>
         </p:nvSpPr>
@@ -13810,7 +13616,7 @@
       </p:sp>
       <p:sp>
         <p:nvSpPr>
-          <p:cNvPr id="168" name="Google Shape;168;p13"/>
+          <p:cNvPr id="156" name="Google Shape;156;p13"/>
           <p:cNvSpPr txBox="1"/>
           <p:nvPr/>
         </p:nvSpPr>
@@ -14004,7 +13810,7 @@
       </p:sp>
       <p:sp>
         <p:nvSpPr>
-          <p:cNvPr id="169" name="Google Shape;169;p13"/>
+          <p:cNvPr id="157" name="Google Shape;157;p13"/>
           <p:cNvSpPr txBox="1"/>
           <p:nvPr/>
         </p:nvSpPr>
@@ -14073,7 +13879,7 @@
       </p:sp>
       <p:sp>
         <p:nvSpPr>
-          <p:cNvPr id="170" name="Google Shape;170;p13"/>
+          <p:cNvPr id="158" name="Google Shape;158;p13"/>
           <p:cNvSpPr txBox="1"/>
           <p:nvPr/>
         </p:nvSpPr>
@@ -14537,7 +14343,7 @@
       </p:sp>
       <p:sp>
         <p:nvSpPr>
-          <p:cNvPr id="171" name="Google Shape;171;p13"/>
+          <p:cNvPr id="159" name="Google Shape;159;p13"/>
           <p:cNvSpPr txBox="1"/>
           <p:nvPr/>
         </p:nvSpPr>
@@ -14603,7 +14409,7 @@
       </p:sp>
       <p:sp>
         <p:nvSpPr>
-          <p:cNvPr id="172" name="Google Shape;172;p13"/>
+          <p:cNvPr id="160" name="Google Shape;160;p13"/>
           <p:cNvSpPr txBox="1"/>
           <p:nvPr/>
         </p:nvSpPr>
@@ -14675,12 +14481,12 @@
 </p:sld>
 </file>
 
-<file path=ppt/slides/slide14.xml><?xml version="1.0" encoding="utf-8"?>
+<file path=ppt/slides/slide12.xml><?xml version="1.0" encoding="utf-8"?>
 <p:sld xmlns:a="http://schemas.openxmlformats.org/drawingml/2006/main" xmlns:r="http://schemas.openxmlformats.org/officeDocument/2006/relationships" xmlns:mc="http://schemas.openxmlformats.org/markup-compatibility/2006" xmlns:mv="urn:schemas-microsoft-com:mac:vml" xmlns:p="http://schemas.openxmlformats.org/presentationml/2006/main" xmlns:c="http://schemas.openxmlformats.org/drawingml/2006/chart" xmlns:dgm="http://schemas.openxmlformats.org/drawingml/2006/diagram" xmlns:o="urn:schemas-microsoft-com:office:office" xmlns:v="urn:schemas-microsoft-com:vml" xmlns:pvml="urn:schemas-microsoft-com:office:powerpoint" xmlns:com="http://schemas.openxmlformats.org/drawingml/2006/compatibility" xmlns:p14="http://schemas.microsoft.com/office/powerpoint/2010/main" xmlns:p15="http://schemas.microsoft.com/office/powerpoint/2012/main" xmlns:ahyp="http://schemas.microsoft.com/office/drawing/2018/hyperlinkcolor">
   <p:cSld>
     <p:spTree>
       <p:nvGrpSpPr>
-        <p:cNvPr id="176" name="Shape 176"/>
+        <p:cNvPr id="164" name="Shape 164"/>
         <p:cNvGrpSpPr/>
         <p:nvPr/>
       </p:nvGrpSpPr>
@@ -14694,7 +14500,7 @@
       </p:grpSpPr>
       <p:sp>
         <p:nvSpPr>
-          <p:cNvPr id="177" name="Google Shape;177;p14"/>
+          <p:cNvPr id="165" name="Google Shape;165;p14"/>
           <p:cNvSpPr txBox="1"/>
           <p:nvPr>
             <p:ph type="title"/>
@@ -14742,7 +14548,7 @@
       </p:sp>
       <p:sp>
         <p:nvSpPr>
-          <p:cNvPr id="178" name="Google Shape;178;p14"/>
+          <p:cNvPr id="166" name="Google Shape;166;p14"/>
           <p:cNvSpPr txBox="1"/>
           <p:nvPr>
             <p:ph idx="1" type="body"/>
@@ -14980,7 +14786,7 @@
       </p:sp>
       <p:pic>
         <p:nvPicPr>
-          <p:cNvPr id="179" name="Google Shape;179;p14"/>
+          <p:cNvPr id="167" name="Google Shape;167;p14"/>
           <p:cNvPicPr preferRelativeResize="0"/>
           <p:nvPr/>
         </p:nvPicPr>
@@ -15007,7 +14813,7 @@
       </p:pic>
       <p:pic>
         <p:nvPicPr>
-          <p:cNvPr id="180" name="Google Shape;180;p14"/>
+          <p:cNvPr id="168" name="Google Shape;168;p14"/>
           <p:cNvPicPr preferRelativeResize="0"/>
           <p:nvPr/>
         </p:nvPicPr>
@@ -15032,42 +14838,24 @@
           </a:ln>
         </p:spPr>
       </p:pic>
-      <p:cxnSp>
-        <p:nvCxnSpPr>
-          <p:cNvPr id="181" name="Google Shape;181;p14"/>
-          <p:cNvCxnSpPr/>
+      <p:pic>
+        <p:nvPicPr>
+          <p:cNvPr id="169" name="Google Shape;169;p14"/>
+          <p:cNvPicPr preferRelativeResize="0"/>
           <p:nvPr/>
-        </p:nvCxnSpPr>
-        <p:spPr>
-          <a:xfrm flipH="1">
-            <a:off x="5846250" y="2661800"/>
-            <a:ext cx="1236600" cy="552900"/>
-          </a:xfrm>
-          <a:prstGeom prst="straightConnector1">
-            <a:avLst/>
-          </a:prstGeom>
-          <a:noFill/>
-          <a:ln cap="flat" cmpd="sng" w="9525">
-            <a:solidFill>
-              <a:schemeClr val="dk2"/>
-            </a:solidFill>
-            <a:prstDash val="solid"/>
-            <a:round/>
-            <a:headEnd len="sm" w="sm" type="none"/>
-            <a:tailEnd len="med" w="med" type="triangle"/>
-          </a:ln>
-        </p:spPr>
-      </p:cxnSp>
-      <p:sp>
-        <p:nvSpPr>
-          <p:cNvPr id="182" name="Google Shape;182;p14"/>
-          <p:cNvSpPr txBox="1"/>
-          <p:nvPr/>
-        </p:nvSpPr>
+        </p:nvPicPr>
+        <p:blipFill>
+          <a:blip r:embed="rId5">
+            <a:alphaModFix/>
+          </a:blip>
+          <a:stretch>
+            <a:fillRect/>
+          </a:stretch>
+        </p:blipFill>
         <p:spPr>
           <a:xfrm>
-            <a:off x="7176550" y="2305775"/>
-            <a:ext cx="1986300" cy="615600"/>
+            <a:off x="4163525" y="3805577"/>
+            <a:ext cx="1516200" cy="733075"/>
           </a:xfrm>
           <a:prstGeom prst="rect">
             <a:avLst/>
@@ -15077,53 +14865,7 @@
             <a:noFill/>
           </a:ln>
         </p:spPr>
-        <p:txBody>
-          <a:bodyPr anchorCtr="0" anchor="t" bIns="91425" lIns="91425" spcFirstLastPara="1" rIns="91425" wrap="square" tIns="91425">
-            <a:spAutoFit/>
-          </a:bodyPr>
-          <a:lstStyle/>
-          <a:p>
-            <a:pPr indent="0" lvl="0" marL="0" marR="0" rtl="0" algn="l">
-              <a:lnSpc>
-                <a:spcPct val="100000"/>
-              </a:lnSpc>
-              <a:spcBef>
-                <a:spcPts val="0"/>
-              </a:spcBef>
-              <a:spcAft>
-                <a:spcPts val="0"/>
-              </a:spcAft>
-              <a:buClr>
-                <a:srgbClr val="000000"/>
-              </a:buClr>
-              <a:buSzPts val="1400"/>
-              <a:buFont typeface="Arial"/>
-              <a:buNone/>
-            </a:pPr>
-            <a:r>
-              <a:rPr b="0" i="0" lang="es-419" sz="1400" u="none" cap="none" strike="noStrike">
-                <a:solidFill>
-                  <a:srgbClr val="000000"/>
-                </a:solidFill>
-                <a:latin typeface="Lato"/>
-                <a:ea typeface="Lato"/>
-                <a:cs typeface="Lato"/>
-                <a:sym typeface="Lato"/>
-              </a:rPr>
-              <a:t>no es diferenciable en todos los puntos</a:t>
-            </a:r>
-            <a:endParaRPr b="0" i="0" sz="1400" u="none" cap="none" strike="noStrike">
-              <a:solidFill>
-                <a:srgbClr val="000000"/>
-              </a:solidFill>
-              <a:latin typeface="Lato"/>
-              <a:ea typeface="Lato"/>
-              <a:cs typeface="Lato"/>
-              <a:sym typeface="Lato"/>
-            </a:endParaRPr>
-          </a:p>
-        </p:txBody>
-      </p:sp>
+      </p:pic>
     </p:spTree>
   </p:cSld>
   <p:clrMapOvr>
@@ -15132,12 +14874,12 @@
 </p:sld>
 </file>
 
-<file path=ppt/slides/slide15.xml><?xml version="1.0" encoding="utf-8"?>
+<file path=ppt/slides/slide13.xml><?xml version="1.0" encoding="utf-8"?>
 <p:sld xmlns:a="http://schemas.openxmlformats.org/drawingml/2006/main" xmlns:r="http://schemas.openxmlformats.org/officeDocument/2006/relationships" xmlns:mc="http://schemas.openxmlformats.org/markup-compatibility/2006" xmlns:mv="urn:schemas-microsoft-com:mac:vml" xmlns:p="http://schemas.openxmlformats.org/presentationml/2006/main" xmlns:c="http://schemas.openxmlformats.org/drawingml/2006/chart" xmlns:dgm="http://schemas.openxmlformats.org/drawingml/2006/diagram" xmlns:o="urn:schemas-microsoft-com:office:office" xmlns:v="urn:schemas-microsoft-com:vml" xmlns:pvml="urn:schemas-microsoft-com:office:powerpoint" xmlns:com="http://schemas.openxmlformats.org/drawingml/2006/compatibility" xmlns:p14="http://schemas.microsoft.com/office/powerpoint/2010/main" xmlns:p15="http://schemas.microsoft.com/office/powerpoint/2012/main" xmlns:ahyp="http://schemas.microsoft.com/office/drawing/2018/hyperlinkcolor">
   <p:cSld>
     <p:spTree>
       <p:nvGrpSpPr>
-        <p:cNvPr id="186" name="Shape 186"/>
+        <p:cNvPr id="173" name="Shape 173"/>
         <p:cNvGrpSpPr/>
         <p:nvPr/>
       </p:nvGrpSpPr>
@@ -15151,7 +14893,7 @@
       </p:grpSpPr>
       <p:sp>
         <p:nvSpPr>
-          <p:cNvPr id="187" name="Google Shape;187;p15"/>
+          <p:cNvPr id="174" name="Google Shape;174;p15"/>
           <p:cNvSpPr txBox="1"/>
           <p:nvPr>
             <p:ph type="title"/>
@@ -15199,7 +14941,7 @@
       </p:sp>
       <p:sp>
         <p:nvSpPr>
-          <p:cNvPr id="188" name="Google Shape;188;p15"/>
+          <p:cNvPr id="175" name="Google Shape;175;p15"/>
           <p:cNvSpPr txBox="1"/>
           <p:nvPr>
             <p:ph idx="1" type="body"/>
@@ -15208,7 +14950,7 @@
         <p:spPr>
           <a:xfrm>
             <a:off x="729450" y="2078875"/>
-            <a:ext cx="7688700" cy="2261100"/>
+            <a:ext cx="4213200" cy="2261100"/>
           </a:xfrm>
           <a:prstGeom prst="rect">
             <a:avLst/>
@@ -15220,7 +14962,7 @@
         </p:spPr>
         <p:txBody>
           <a:bodyPr anchorCtr="0" anchor="t" bIns="91425" lIns="91425" spcFirstLastPara="1" rIns="91425" wrap="square" tIns="91425">
-            <a:normAutofit/>
+            <a:normAutofit fontScale="85000" lnSpcReduction="20000"/>
           </a:bodyPr>
           <a:lstStyle/>
           <a:p>
@@ -15234,7 +14976,7 @@
               <a:spcAft>
                 <a:spcPts val="0"/>
               </a:spcAft>
-              <a:buSzPts val="1300"/>
+              <a:buSzPct val="100000"/>
               <a:buNone/>
             </a:pPr>
             <a:r>
@@ -15252,9 +14994,9 @@
                 <a:spcPts val="1200"/>
               </a:spcBef>
               <a:spcAft>
-                <a:spcPts val="1200"/>
-              </a:spcAft>
-              <a:buSzPts val="1300"/>
+                <a:spcPts val="0"/>
+              </a:spcAft>
+              <a:buSzPct val="100000"/>
               <a:buNone/>
             </a:pPr>
             <a:r>
@@ -15266,7 +15008,115 @@
                   <a:schemeClr val="lt1"/>
                 </a:highlight>
               </a:rPr>
-              <a:t>Mide la variabilidad total en los valores reales (la suma de los cuadrados de las diferencias entre los valores reales y la media de los valores reales). </a:t>
+              <a:t>Mide la variabilidad total de los valores reales respecto de su media</a:t>
+            </a:r>
+            <a:r>
+              <a:rPr lang="es-419">
+                <a:solidFill>
+                  <a:srgbClr val="374151"/>
+                </a:solidFill>
+                <a:highlight>
+                  <a:schemeClr val="lt1"/>
+                </a:highlight>
+              </a:rPr>
+              <a:t> (la suma de los cuadrados de las diferencias entre los valores reales y la media de los valores reales).</a:t>
+            </a:r>
+            <a:endParaRPr>
+              <a:solidFill>
+                <a:srgbClr val="374151"/>
+              </a:solidFill>
+              <a:highlight>
+                <a:schemeClr val="lt1"/>
+              </a:highlight>
+            </a:endParaRPr>
+          </a:p>
+          <a:p>
+            <a:pPr indent="0" lvl="0" marL="0" rtl="0" algn="l">
+              <a:lnSpc>
+                <a:spcPct val="115000"/>
+              </a:lnSpc>
+              <a:spcBef>
+                <a:spcPts val="1200"/>
+              </a:spcBef>
+              <a:spcAft>
+                <a:spcPts val="0"/>
+              </a:spcAft>
+              <a:buSzPct val="100000"/>
+              <a:buNone/>
+            </a:pPr>
+            <a:r>
+              <a:t/>
+            </a:r>
+            <a:endParaRPr>
+              <a:solidFill>
+                <a:srgbClr val="374151"/>
+              </a:solidFill>
+              <a:highlight>
+                <a:schemeClr val="lt1"/>
+              </a:highlight>
+            </a:endParaRPr>
+          </a:p>
+          <a:p>
+            <a:pPr indent="0" lvl="0" marL="0" rtl="0" algn="l">
+              <a:lnSpc>
+                <a:spcPct val="115000"/>
+              </a:lnSpc>
+              <a:spcBef>
+                <a:spcPts val="1200"/>
+              </a:spcBef>
+              <a:spcAft>
+                <a:spcPts val="0"/>
+              </a:spcAft>
+              <a:buSzPct val="100000"/>
+              <a:buNone/>
+            </a:pPr>
+            <a:r>
+              <a:t/>
+            </a:r>
+            <a:endParaRPr>
+              <a:solidFill>
+                <a:srgbClr val="374151"/>
+              </a:solidFill>
+              <a:highlight>
+                <a:schemeClr val="lt1"/>
+              </a:highlight>
+            </a:endParaRPr>
+          </a:p>
+          <a:p>
+            <a:pPr indent="0" lvl="0" marL="0" rtl="0" algn="l">
+              <a:lnSpc>
+                <a:spcPct val="115000"/>
+              </a:lnSpc>
+              <a:spcBef>
+                <a:spcPts val="1200"/>
+              </a:spcBef>
+              <a:spcAft>
+                <a:spcPts val="1200"/>
+              </a:spcAft>
+              <a:buSzPct val="92857"/>
+              <a:buNone/>
+            </a:pPr>
+            <a:r>
+              <a:rPr lang="es-419">
+                <a:solidFill>
+                  <a:srgbClr val="374151"/>
+                </a:solidFill>
+                <a:highlight>
+                  <a:schemeClr val="lt1"/>
+                </a:highlight>
+              </a:rPr>
+              <a:t>TSS representa el error que tendríamos si, en lugar de utilizar un modelo, predijéramos siempre la media. </a:t>
+            </a:r>
+            <a:r>
+              <a:rPr lang="es-419">
+                <a:solidFill>
+                  <a:srgbClr val="374151"/>
+                </a:solidFill>
+                <a:highlight>
+                  <a:schemeClr val="lt1"/>
+                </a:highlight>
+              </a:rPr>
+              <a:t> </a:t>
             </a:r>
             <a:endParaRPr sz="1400">
               <a:highlight>
@@ -15278,7 +15128,7 @@
       </p:sp>
       <p:pic>
         <p:nvPicPr>
-          <p:cNvPr id="189" name="Google Shape;189;p15"/>
+          <p:cNvPr id="176" name="Google Shape;176;p15"/>
           <p:cNvPicPr preferRelativeResize="0"/>
           <p:nvPr/>
         </p:nvPicPr>
@@ -15291,8 +15141,88 @@
         </p:blipFill>
         <p:spPr>
           <a:xfrm>
-            <a:off x="3586163" y="3159800"/>
-            <a:ext cx="1971675" cy="828675"/>
+            <a:off x="2041075" y="3178275"/>
+            <a:ext cx="1421350" cy="597375"/>
+          </a:xfrm>
+          <a:prstGeom prst="rect">
+            <a:avLst/>
+          </a:prstGeom>
+          <a:noFill/>
+          <a:ln>
+            <a:noFill/>
+          </a:ln>
+        </p:spPr>
+      </p:pic>
+      <p:pic>
+        <p:nvPicPr>
+          <p:cNvPr id="177" name="Google Shape;177;p15"/>
+          <p:cNvPicPr preferRelativeResize="0"/>
+          <p:nvPr/>
+        </p:nvPicPr>
+        <p:blipFill rotWithShape="1">
+          <a:blip r:embed="rId4">
+            <a:alphaModFix/>
+          </a:blip>
+          <a:srcRect b="0" l="3791" r="0" t="0"/>
+          <a:stretch/>
+        </p:blipFill>
+        <p:spPr>
+          <a:xfrm>
+            <a:off x="4808400" y="1966363"/>
+            <a:ext cx="3871025" cy="2486125"/>
+          </a:xfrm>
+          <a:prstGeom prst="rect">
+            <a:avLst/>
+          </a:prstGeom>
+          <a:noFill/>
+          <a:ln>
+            <a:noFill/>
+          </a:ln>
+        </p:spPr>
+      </p:pic>
+      <p:cxnSp>
+        <p:nvCxnSpPr>
+          <p:cNvPr id="178" name="Google Shape;178;p15"/>
+          <p:cNvCxnSpPr/>
+          <p:nvPr/>
+        </p:nvCxnSpPr>
+        <p:spPr>
+          <a:xfrm flipH="1" rot="10800000">
+            <a:off x="5405825" y="2996725"/>
+            <a:ext cx="3097200" cy="20700"/>
+          </a:xfrm>
+          <a:prstGeom prst="straightConnector1">
+            <a:avLst/>
+          </a:prstGeom>
+          <a:noFill/>
+          <a:ln cap="flat" cmpd="sng" w="28575">
+            <a:solidFill>
+              <a:srgbClr val="FF9900"/>
+            </a:solidFill>
+            <a:prstDash val="solid"/>
+            <a:round/>
+            <a:headEnd len="med" w="med" type="none"/>
+            <a:tailEnd len="med" w="med" type="none"/>
+          </a:ln>
+        </p:spPr>
+      </p:cxnSp>
+      <p:pic>
+        <p:nvPicPr>
+          <p:cNvPr id="179" name="Google Shape;179;p15"/>
+          <p:cNvPicPr preferRelativeResize="0"/>
+          <p:nvPr/>
+        </p:nvPicPr>
+        <p:blipFill rotWithShape="1">
+          <a:blip r:embed="rId5">
+            <a:alphaModFix/>
+          </a:blip>
+          <a:srcRect b="0" l="0" r="18540" t="0"/>
+          <a:stretch/>
+        </p:blipFill>
+        <p:spPr>
+          <a:xfrm>
+            <a:off x="5405825" y="2701550"/>
+            <a:ext cx="171675" cy="226950"/>
           </a:xfrm>
           <a:prstGeom prst="rect">
             <a:avLst/>
@@ -15311,12 +15241,12 @@
 </p:sld>
 </file>
 
-<file path=ppt/slides/slide16.xml><?xml version="1.0" encoding="utf-8"?>
+<file path=ppt/slides/slide14.xml><?xml version="1.0" encoding="utf-8"?>
 <p:sld xmlns:a="http://schemas.openxmlformats.org/drawingml/2006/main" xmlns:r="http://schemas.openxmlformats.org/officeDocument/2006/relationships" xmlns:mc="http://schemas.openxmlformats.org/markup-compatibility/2006" xmlns:mv="urn:schemas-microsoft-com:mac:vml" xmlns:p="http://schemas.openxmlformats.org/presentationml/2006/main" xmlns:c="http://schemas.openxmlformats.org/drawingml/2006/chart" xmlns:dgm="http://schemas.openxmlformats.org/drawingml/2006/diagram" xmlns:o="urn:schemas-microsoft-com:office:office" xmlns:v="urn:schemas-microsoft-com:vml" xmlns:pvml="urn:schemas-microsoft-com:office:powerpoint" xmlns:com="http://schemas.openxmlformats.org/drawingml/2006/compatibility" xmlns:p14="http://schemas.microsoft.com/office/powerpoint/2010/main" xmlns:p15="http://schemas.microsoft.com/office/powerpoint/2012/main" xmlns:ahyp="http://schemas.microsoft.com/office/drawing/2018/hyperlinkcolor">
   <p:cSld>
     <p:spTree>
       <p:nvGrpSpPr>
-        <p:cNvPr id="193" name="Shape 193"/>
+        <p:cNvPr id="183" name="Shape 183"/>
         <p:cNvGrpSpPr/>
         <p:nvPr/>
       </p:nvGrpSpPr>
@@ -15330,7 +15260,7 @@
       </p:grpSpPr>
       <p:sp>
         <p:nvSpPr>
-          <p:cNvPr id="194" name="Google Shape;194;p16"/>
+          <p:cNvPr id="184" name="Google Shape;184;g3f407d6dfef_0_5"/>
           <p:cNvSpPr txBox="1"/>
           <p:nvPr>
             <p:ph type="title"/>
@@ -15378,7 +15308,412 @@
       </p:sp>
       <p:sp>
         <p:nvSpPr>
+          <p:cNvPr id="185" name="Google Shape;185;g3f407d6dfef_0_5"/>
+          <p:cNvSpPr txBox="1"/>
+          <p:nvPr>
+            <p:ph idx="1" type="body"/>
+          </p:nvPr>
+        </p:nvSpPr>
+        <p:spPr>
+          <a:xfrm>
+            <a:off x="729450" y="1911425"/>
+            <a:ext cx="4213200" cy="2261100"/>
+          </a:xfrm>
+          <a:prstGeom prst="rect">
+            <a:avLst/>
+          </a:prstGeom>
+          <a:noFill/>
+          <a:ln>
+            <a:noFill/>
+          </a:ln>
+        </p:spPr>
+        <p:txBody>
+          <a:bodyPr anchorCtr="0" anchor="t" bIns="91425" lIns="91425" spcFirstLastPara="1" rIns="91425" wrap="square" tIns="91425">
+            <a:normAutofit fontScale="77500"/>
+          </a:bodyPr>
+          <a:lstStyle/>
+          <a:p>
+            <a:pPr indent="0" lvl="0" marL="0" rtl="0" algn="l">
+              <a:lnSpc>
+                <a:spcPct val="115000"/>
+              </a:lnSpc>
+              <a:spcBef>
+                <a:spcPts val="1200"/>
+              </a:spcBef>
+              <a:spcAft>
+                <a:spcPts val="0"/>
+              </a:spcAft>
+              <a:buSzPct val="100000"/>
+              <a:buNone/>
+            </a:pPr>
+            <a:r>
+              <a:rPr lang="es-419"/>
+              <a:t>¿Qué tan lejos están los valores reales de lo que predice nuestro modelo? </a:t>
+            </a:r>
+            <a:endParaRPr/>
+          </a:p>
+          <a:p>
+            <a:pPr indent="-292576" lvl="0" marL="457200" rtl="0" algn="l">
+              <a:lnSpc>
+                <a:spcPct val="115000"/>
+              </a:lnSpc>
+              <a:spcBef>
+                <a:spcPts val="1200"/>
+              </a:spcBef>
+              <a:spcAft>
+                <a:spcPts val="0"/>
+              </a:spcAft>
+              <a:buSzPct val="100000"/>
+              <a:buChar char="-"/>
+            </a:pPr>
+            <a:r>
+              <a:rPr lang="es-419"/>
+              <a:t>Variabilidad que no puede explicarse por la regresión lineal.</a:t>
+            </a:r>
+            <a:endParaRPr>
+              <a:solidFill>
+                <a:srgbClr val="374151"/>
+              </a:solidFill>
+              <a:highlight>
+                <a:schemeClr val="lt1"/>
+              </a:highlight>
+            </a:endParaRPr>
+          </a:p>
+          <a:p>
+            <a:pPr indent="0" lvl="0" marL="0" rtl="0" algn="l">
+              <a:lnSpc>
+                <a:spcPct val="115000"/>
+              </a:lnSpc>
+              <a:spcBef>
+                <a:spcPts val="1200"/>
+              </a:spcBef>
+              <a:spcAft>
+                <a:spcPts val="0"/>
+              </a:spcAft>
+              <a:buSzPct val="100000"/>
+              <a:buNone/>
+            </a:pPr>
+            <a:r>
+              <a:t/>
+            </a:r>
+            <a:endParaRPr>
+              <a:solidFill>
+                <a:srgbClr val="374151"/>
+              </a:solidFill>
+              <a:highlight>
+                <a:schemeClr val="lt1"/>
+              </a:highlight>
+            </a:endParaRPr>
+          </a:p>
+          <a:p>
+            <a:pPr indent="0" lvl="0" marL="0" rtl="0" algn="l">
+              <a:lnSpc>
+                <a:spcPct val="115000"/>
+              </a:lnSpc>
+              <a:spcBef>
+                <a:spcPts val="1200"/>
+              </a:spcBef>
+              <a:spcAft>
+                <a:spcPts val="0"/>
+              </a:spcAft>
+              <a:buSzPct val="100000"/>
+              <a:buNone/>
+            </a:pPr>
+            <a:r>
+              <a:t/>
+            </a:r>
+            <a:endParaRPr>
+              <a:solidFill>
+                <a:srgbClr val="374151"/>
+              </a:solidFill>
+              <a:highlight>
+                <a:schemeClr val="lt1"/>
+              </a:highlight>
+            </a:endParaRPr>
+          </a:p>
+          <a:p>
+            <a:pPr indent="0" lvl="0" marL="0" rtl="0" algn="l">
+              <a:lnSpc>
+                <a:spcPct val="115000"/>
+              </a:lnSpc>
+              <a:spcBef>
+                <a:spcPts val="1200"/>
+              </a:spcBef>
+              <a:spcAft>
+                <a:spcPts val="0"/>
+              </a:spcAft>
+              <a:buSzPct val="100000"/>
+              <a:buNone/>
+            </a:pPr>
+            <a:r>
+              <a:rPr lang="es-419">
+                <a:solidFill>
+                  <a:srgbClr val="374151"/>
+                </a:solidFill>
+                <a:highlight>
+                  <a:schemeClr val="lt1"/>
+                </a:highlight>
+              </a:rPr>
+              <a:t>¿Qué tan lejos están los valores reales de simplemente utilizar la media como predicción? </a:t>
+            </a:r>
+            <a:endParaRPr>
+              <a:solidFill>
+                <a:srgbClr val="374151"/>
+              </a:solidFill>
+              <a:highlight>
+                <a:schemeClr val="lt1"/>
+              </a:highlight>
+            </a:endParaRPr>
+          </a:p>
+          <a:p>
+            <a:pPr indent="-292576" lvl="0" marL="457200" rtl="0" algn="l">
+              <a:lnSpc>
+                <a:spcPct val="115000"/>
+              </a:lnSpc>
+              <a:spcBef>
+                <a:spcPts val="1200"/>
+              </a:spcBef>
+              <a:spcAft>
+                <a:spcPts val="0"/>
+              </a:spcAft>
+              <a:buClr>
+                <a:srgbClr val="374151"/>
+              </a:buClr>
+              <a:buSzPct val="92857"/>
+              <a:buChar char="-"/>
+            </a:pPr>
+            <a:r>
+              <a:rPr lang="es-419">
+                <a:solidFill>
+                  <a:srgbClr val="374151"/>
+                </a:solidFill>
+                <a:highlight>
+                  <a:schemeClr val="lt1"/>
+                </a:highlight>
+              </a:rPr>
+              <a:t>Variabilidad de los Datos</a:t>
+            </a:r>
+            <a:endParaRPr sz="1400">
+              <a:highlight>
+                <a:schemeClr val="lt1"/>
+              </a:highlight>
+            </a:endParaRPr>
+          </a:p>
+        </p:txBody>
+      </p:sp>
+      <p:pic>
+        <p:nvPicPr>
+          <p:cNvPr id="186" name="Google Shape;186;g3f407d6dfef_0_5"/>
+          <p:cNvPicPr preferRelativeResize="0"/>
+          <p:nvPr/>
+        </p:nvPicPr>
+        <p:blipFill rotWithShape="1">
+          <a:blip r:embed="rId3">
+            <a:alphaModFix/>
+          </a:blip>
+          <a:srcRect b="0" l="0" r="0" t="0"/>
+          <a:stretch/>
+        </p:blipFill>
+        <p:spPr>
+          <a:xfrm>
+            <a:off x="2075400" y="4051550"/>
+            <a:ext cx="1421350" cy="597375"/>
+          </a:xfrm>
+          <a:prstGeom prst="rect">
+            <a:avLst/>
+          </a:prstGeom>
+          <a:noFill/>
+          <a:ln>
+            <a:noFill/>
+          </a:ln>
+        </p:spPr>
+      </p:pic>
+      <p:pic>
+        <p:nvPicPr>
+          <p:cNvPr id="187" name="Google Shape;187;g3f407d6dfef_0_5" title="ANOVA-graphically.png"/>
+          <p:cNvPicPr preferRelativeResize="0"/>
+          <p:nvPr/>
+        </p:nvPicPr>
+        <p:blipFill>
+          <a:blip r:embed="rId4">
+            <a:alphaModFix/>
+          </a:blip>
+          <a:stretch>
+            <a:fillRect/>
+          </a:stretch>
+        </p:blipFill>
+        <p:spPr>
+          <a:xfrm>
+            <a:off x="4978300" y="1717000"/>
+            <a:ext cx="3647487" cy="2984850"/>
+          </a:xfrm>
+          <a:prstGeom prst="rect">
+            <a:avLst/>
+          </a:prstGeom>
+          <a:noFill/>
+          <a:ln>
+            <a:noFill/>
+          </a:ln>
+        </p:spPr>
+      </p:pic>
+      <p:pic>
+        <p:nvPicPr>
+          <p:cNvPr id="188" name="Google Shape;188;g3f407d6dfef_0_5"/>
+          <p:cNvPicPr preferRelativeResize="0"/>
+          <p:nvPr/>
+        </p:nvPicPr>
+        <p:blipFill>
+          <a:blip r:embed="rId5">
+            <a:alphaModFix/>
+          </a:blip>
+          <a:stretch>
+            <a:fillRect/>
+          </a:stretch>
+        </p:blipFill>
+        <p:spPr>
+          <a:xfrm>
+            <a:off x="1626989" y="2667200"/>
+            <a:ext cx="2318175" cy="408800"/>
+          </a:xfrm>
+          <a:prstGeom prst="rect">
+            <a:avLst/>
+          </a:prstGeom>
+          <a:noFill/>
+          <a:ln>
+            <a:noFill/>
+          </a:ln>
+        </p:spPr>
+      </p:pic>
+      <p:pic>
+        <p:nvPicPr>
+          <p:cNvPr id="189" name="Google Shape;189;g3f407d6dfef_0_5"/>
+          <p:cNvPicPr preferRelativeResize="0"/>
+          <p:nvPr/>
+        </p:nvPicPr>
+        <p:blipFill>
+          <a:blip r:embed="rId6">
+            <a:alphaModFix/>
+          </a:blip>
+          <a:stretch>
+            <a:fillRect/>
+          </a:stretch>
+        </p:blipFill>
+        <p:spPr>
+          <a:xfrm>
+            <a:off x="7692550" y="2926725"/>
+            <a:ext cx="725600" cy="489000"/>
+          </a:xfrm>
+          <a:prstGeom prst="rect">
+            <a:avLst/>
+          </a:prstGeom>
+          <a:noFill/>
+          <a:ln>
+            <a:noFill/>
+          </a:ln>
+        </p:spPr>
+      </p:pic>
+      <p:cxnSp>
+        <p:nvCxnSpPr>
+          <p:cNvPr id="190" name="Google Shape;190;g3f407d6dfef_0_5"/>
+          <p:cNvCxnSpPr/>
+          <p:nvPr/>
+        </p:nvCxnSpPr>
+        <p:spPr>
+          <a:xfrm flipH="1" rot="10800000">
+            <a:off x="5158600" y="2598400"/>
+            <a:ext cx="3035400" cy="1971000"/>
+          </a:xfrm>
+          <a:prstGeom prst="straightConnector1">
+            <a:avLst/>
+          </a:prstGeom>
+          <a:noFill/>
+          <a:ln cap="flat" cmpd="sng" w="19050">
+            <a:solidFill>
+              <a:schemeClr val="accent3"/>
+            </a:solidFill>
+            <a:prstDash val="solid"/>
+            <a:round/>
+            <a:headEnd len="med" w="med" type="none"/>
+            <a:tailEnd len="med" w="med" type="none"/>
+          </a:ln>
+        </p:spPr>
+      </p:cxnSp>
+    </p:spTree>
+  </p:cSld>
+  <p:clrMapOvr>
+    <a:masterClrMapping/>
+  </p:clrMapOvr>
+</p:sld>
+</file>
+
+<file path=ppt/slides/slide15.xml><?xml version="1.0" encoding="utf-8"?>
+<p:sld xmlns:a="http://schemas.openxmlformats.org/drawingml/2006/main" xmlns:r="http://schemas.openxmlformats.org/officeDocument/2006/relationships" xmlns:mc="http://schemas.openxmlformats.org/markup-compatibility/2006" xmlns:mv="urn:schemas-microsoft-com:mac:vml" xmlns:p="http://schemas.openxmlformats.org/presentationml/2006/main" xmlns:c="http://schemas.openxmlformats.org/drawingml/2006/chart" xmlns:dgm="http://schemas.openxmlformats.org/drawingml/2006/diagram" xmlns:o="urn:schemas-microsoft-com:office:office" xmlns:v="urn:schemas-microsoft-com:vml" xmlns:pvml="urn:schemas-microsoft-com:office:powerpoint" xmlns:com="http://schemas.openxmlformats.org/drawingml/2006/compatibility" xmlns:p14="http://schemas.microsoft.com/office/powerpoint/2010/main" xmlns:p15="http://schemas.microsoft.com/office/powerpoint/2012/main" xmlns:ahyp="http://schemas.microsoft.com/office/drawing/2018/hyperlinkcolor">
+  <p:cSld>
+    <p:spTree>
+      <p:nvGrpSpPr>
+        <p:cNvPr id="194" name="Shape 194"/>
+        <p:cNvGrpSpPr/>
+        <p:nvPr/>
+      </p:nvGrpSpPr>
+      <p:grpSpPr>
+        <a:xfrm>
+          <a:off x="0" y="0"/>
+          <a:ext cx="0" cy="0"/>
+          <a:chOff x="0" y="0"/>
+          <a:chExt cx="0" cy="0"/>
+        </a:xfrm>
+      </p:grpSpPr>
+      <p:sp>
+        <p:nvSpPr>
           <p:cNvPr id="195" name="Google Shape;195;p16"/>
+          <p:cNvSpPr txBox="1"/>
+          <p:nvPr>
+            <p:ph type="title"/>
+          </p:nvPr>
+        </p:nvSpPr>
+        <p:spPr>
+          <a:xfrm>
+            <a:off x="729450" y="1318650"/>
+            <a:ext cx="7688700" cy="535200"/>
+          </a:xfrm>
+          <a:prstGeom prst="rect">
+            <a:avLst/>
+          </a:prstGeom>
+          <a:noFill/>
+          <a:ln>
+            <a:noFill/>
+          </a:ln>
+        </p:spPr>
+        <p:txBody>
+          <a:bodyPr anchorCtr="0" anchor="t" bIns="91425" lIns="91425" spcFirstLastPara="1" rIns="91425" wrap="square" tIns="91425">
+            <a:normAutofit fontScale="90000"/>
+          </a:bodyPr>
+          <a:lstStyle/>
+          <a:p>
+            <a:pPr indent="0" lvl="0" marL="0" rtl="0" algn="l">
+              <a:lnSpc>
+                <a:spcPct val="100000"/>
+              </a:lnSpc>
+              <a:spcBef>
+                <a:spcPts val="0"/>
+              </a:spcBef>
+              <a:spcAft>
+                <a:spcPts val="0"/>
+              </a:spcAft>
+              <a:buSzPct val="111111"/>
+              <a:buNone/>
+            </a:pPr>
+            <a:r>
+              <a:rPr lang="es-419"/>
+              <a:t>Métricas</a:t>
+            </a:r>
+            <a:endParaRPr/>
+          </a:p>
+        </p:txBody>
+      </p:sp>
+      <p:sp>
+        <p:nvSpPr>
+          <p:cNvPr id="196" name="Google Shape;196;p16"/>
           <p:cNvSpPr txBox="1"/>
           <p:nvPr>
             <p:ph idx="1" type="body"/>
@@ -15506,7 +15841,7 @@
       </p:sp>
       <p:pic>
         <p:nvPicPr>
-          <p:cNvPr id="196" name="Google Shape;196;p16"/>
+          <p:cNvPr id="197" name="Google Shape;197;p16"/>
           <p:cNvPicPr preferRelativeResize="0"/>
           <p:nvPr/>
         </p:nvPicPr>
@@ -15539,12 +15874,12 @@
 </p:sld>
 </file>
 
-<file path=ppt/slides/slide17.xml><?xml version="1.0" encoding="utf-8"?>
+<file path=ppt/slides/slide16.xml><?xml version="1.0" encoding="utf-8"?>
 <p:sld xmlns:a="http://schemas.openxmlformats.org/drawingml/2006/main" xmlns:r="http://schemas.openxmlformats.org/officeDocument/2006/relationships" xmlns:mc="http://schemas.openxmlformats.org/markup-compatibility/2006" xmlns:mv="urn:schemas-microsoft-com:mac:vml" xmlns:p="http://schemas.openxmlformats.org/presentationml/2006/main" xmlns:c="http://schemas.openxmlformats.org/drawingml/2006/chart" xmlns:dgm="http://schemas.openxmlformats.org/drawingml/2006/diagram" xmlns:o="urn:schemas-microsoft-com:office:office" xmlns:v="urn:schemas-microsoft-com:vml" xmlns:pvml="urn:schemas-microsoft-com:office:powerpoint" xmlns:com="http://schemas.openxmlformats.org/drawingml/2006/compatibility" xmlns:p14="http://schemas.microsoft.com/office/powerpoint/2010/main" xmlns:p15="http://schemas.microsoft.com/office/powerpoint/2012/main" xmlns:ahyp="http://schemas.microsoft.com/office/drawing/2018/hyperlinkcolor">
   <p:cSld>
     <p:spTree>
       <p:nvGrpSpPr>
-        <p:cNvPr id="200" name="Shape 200"/>
+        <p:cNvPr id="201" name="Shape 201"/>
         <p:cNvGrpSpPr/>
         <p:nvPr/>
       </p:nvGrpSpPr>
@@ -15558,7 +15893,7 @@
       </p:grpSpPr>
       <p:sp>
         <p:nvSpPr>
-          <p:cNvPr id="201" name="Google Shape;201;g395883b0ceb_2_0"/>
+          <p:cNvPr id="202" name="Google Shape;202;g395883b0ceb_2_0"/>
           <p:cNvSpPr txBox="1"/>
           <p:nvPr>
             <p:ph type="title"/>
@@ -15612,12 +15947,12 @@
 </p:sld>
 </file>
 
-<file path=ppt/slides/slide18.xml><?xml version="1.0" encoding="utf-8"?>
+<file path=ppt/slides/slide17.xml><?xml version="1.0" encoding="utf-8"?>
 <p:sld xmlns:a="http://schemas.openxmlformats.org/drawingml/2006/main" xmlns:r="http://schemas.openxmlformats.org/officeDocument/2006/relationships" xmlns:mc="http://schemas.openxmlformats.org/markup-compatibility/2006" xmlns:mv="urn:schemas-microsoft-com:mac:vml" xmlns:p="http://schemas.openxmlformats.org/presentationml/2006/main" xmlns:c="http://schemas.openxmlformats.org/drawingml/2006/chart" xmlns:dgm="http://schemas.openxmlformats.org/drawingml/2006/diagram" xmlns:o="urn:schemas-microsoft-com:office:office" xmlns:v="urn:schemas-microsoft-com:vml" xmlns:pvml="urn:schemas-microsoft-com:office:powerpoint" xmlns:com="http://schemas.openxmlformats.org/drawingml/2006/compatibility" xmlns:p14="http://schemas.microsoft.com/office/powerpoint/2010/main" xmlns:p15="http://schemas.microsoft.com/office/powerpoint/2012/main" xmlns:ahyp="http://schemas.microsoft.com/office/drawing/2018/hyperlinkcolor">
   <p:cSld>
     <p:spTree>
       <p:nvGrpSpPr>
-        <p:cNvPr id="205" name="Shape 205"/>
+        <p:cNvPr id="206" name="Shape 206"/>
         <p:cNvGrpSpPr/>
         <p:nvPr/>
       </p:nvGrpSpPr>
@@ -15631,7 +15966,7 @@
       </p:grpSpPr>
       <p:sp>
         <p:nvSpPr>
-          <p:cNvPr id="206" name="Google Shape;206;g395883b0ceb_2_4"/>
+          <p:cNvPr id="207" name="Google Shape;207;g395883b0ceb_2_4"/>
           <p:cNvSpPr txBox="1"/>
           <p:nvPr>
             <p:ph type="title"/>
@@ -15679,7 +16014,7 @@
       </p:sp>
       <p:sp>
         <p:nvSpPr>
-          <p:cNvPr id="207" name="Google Shape;207;g395883b0ceb_2_4"/>
+          <p:cNvPr id="208" name="Google Shape;208;g395883b0ceb_2_4"/>
           <p:cNvSpPr txBox="1"/>
           <p:nvPr>
             <p:ph idx="1" type="body"/>
@@ -15950,12 +16285,12 @@
 </p:sld>
 </file>
 
-<file path=ppt/slides/slide19.xml><?xml version="1.0" encoding="utf-8"?>
+<file path=ppt/slides/slide18.xml><?xml version="1.0" encoding="utf-8"?>
 <p:sld xmlns:a="http://schemas.openxmlformats.org/drawingml/2006/main" xmlns:r="http://schemas.openxmlformats.org/officeDocument/2006/relationships" xmlns:mc="http://schemas.openxmlformats.org/markup-compatibility/2006" xmlns:mv="urn:schemas-microsoft-com:mac:vml" xmlns:p="http://schemas.openxmlformats.org/presentationml/2006/main" xmlns:c="http://schemas.openxmlformats.org/drawingml/2006/chart" xmlns:dgm="http://schemas.openxmlformats.org/drawingml/2006/diagram" xmlns:o="urn:schemas-microsoft-com:office:office" xmlns:v="urn:schemas-microsoft-com:vml" xmlns:pvml="urn:schemas-microsoft-com:office:powerpoint" xmlns:com="http://schemas.openxmlformats.org/drawingml/2006/compatibility" xmlns:p14="http://schemas.microsoft.com/office/powerpoint/2010/main" xmlns:p15="http://schemas.microsoft.com/office/powerpoint/2012/main" xmlns:ahyp="http://schemas.microsoft.com/office/drawing/2018/hyperlinkcolor">
   <p:cSld>
     <p:spTree>
       <p:nvGrpSpPr>
-        <p:cNvPr id="211" name="Shape 211"/>
+        <p:cNvPr id="212" name="Shape 212"/>
         <p:cNvGrpSpPr/>
         <p:nvPr/>
       </p:nvGrpSpPr>
@@ -15969,7 +16304,7 @@
       </p:grpSpPr>
       <p:sp>
         <p:nvSpPr>
-          <p:cNvPr id="212" name="Google Shape;212;g395883b0ceb_2_9"/>
+          <p:cNvPr id="213" name="Google Shape;213;g395883b0ceb_2_9"/>
           <p:cNvSpPr txBox="1"/>
           <p:nvPr>
             <p:ph type="title"/>
@@ -16017,7 +16352,7 @@
       </p:sp>
       <p:pic>
         <p:nvPicPr>
-          <p:cNvPr id="213" name="Google Shape;213;g395883b0ceb_2_9"/>
+          <p:cNvPr id="214" name="Google Shape;214;g395883b0ceb_2_9"/>
           <p:cNvPicPr preferRelativeResize="0"/>
           <p:nvPr/>
         </p:nvPicPr>
@@ -16032,6 +16367,125 @@
           <a:xfrm>
             <a:off x="2678325" y="2457150"/>
             <a:ext cx="3790950" cy="866775"/>
+          </a:xfrm>
+          <a:prstGeom prst="rect">
+            <a:avLst/>
+          </a:prstGeom>
+          <a:noFill/>
+          <a:ln>
+            <a:noFill/>
+          </a:ln>
+        </p:spPr>
+      </p:pic>
+    </p:spTree>
+  </p:cSld>
+  <p:clrMapOvr>
+    <a:masterClrMapping/>
+  </p:clrMapOvr>
+</p:sld>
+</file>
+
+<file path=ppt/slides/slide19.xml><?xml version="1.0" encoding="utf-8"?>
+<p:sld xmlns:a="http://schemas.openxmlformats.org/drawingml/2006/main" xmlns:r="http://schemas.openxmlformats.org/officeDocument/2006/relationships" xmlns:mc="http://schemas.openxmlformats.org/markup-compatibility/2006" xmlns:mv="urn:schemas-microsoft-com:mac:vml" xmlns:p="http://schemas.openxmlformats.org/presentationml/2006/main" xmlns:c="http://schemas.openxmlformats.org/drawingml/2006/chart" xmlns:dgm="http://schemas.openxmlformats.org/drawingml/2006/diagram" xmlns:o="urn:schemas-microsoft-com:office:office" xmlns:v="urn:schemas-microsoft-com:vml" xmlns:pvml="urn:schemas-microsoft-com:office:powerpoint" xmlns:com="http://schemas.openxmlformats.org/drawingml/2006/compatibility" xmlns:p14="http://schemas.microsoft.com/office/powerpoint/2010/main" xmlns:p15="http://schemas.microsoft.com/office/powerpoint/2012/main" xmlns:ahyp="http://schemas.microsoft.com/office/drawing/2018/hyperlinkcolor">
+  <p:cSld>
+    <p:spTree>
+      <p:nvGrpSpPr>
+        <p:cNvPr id="218" name="Shape 218"/>
+        <p:cNvGrpSpPr/>
+        <p:nvPr/>
+      </p:nvGrpSpPr>
+      <p:grpSpPr>
+        <a:xfrm>
+          <a:off x="0" y="0"/>
+          <a:ext cx="0" cy="0"/>
+          <a:chOff x="0" y="0"/>
+          <a:chExt cx="0" cy="0"/>
+        </a:xfrm>
+      </p:grpSpPr>
+      <p:sp>
+        <p:nvSpPr>
+          <p:cNvPr id="219" name="Google Shape;219;g395883b0ceb_2_14"/>
+          <p:cNvSpPr txBox="1"/>
+          <p:nvPr>
+            <p:ph type="title"/>
+          </p:nvPr>
+        </p:nvSpPr>
+        <p:spPr>
+          <a:xfrm>
+            <a:off x="729450" y="1318650"/>
+            <a:ext cx="7688700" cy="535200"/>
+          </a:xfrm>
+          <a:prstGeom prst="rect">
+            <a:avLst/>
+          </a:prstGeom>
+          <a:noFill/>
+          <a:ln>
+            <a:noFill/>
+          </a:ln>
+        </p:spPr>
+        <p:txBody>
+          <a:bodyPr anchorCtr="0" anchor="t" bIns="91425" lIns="91425" spcFirstLastPara="1" rIns="91425" wrap="square" tIns="91425">
+            <a:normAutofit fontScale="90000"/>
+          </a:bodyPr>
+          <a:lstStyle/>
+          <a:p>
+            <a:pPr indent="0" lvl="0" marL="0" rtl="0" algn="l">
+              <a:lnSpc>
+                <a:spcPct val="100000"/>
+              </a:lnSpc>
+              <a:spcBef>
+                <a:spcPts val="0"/>
+              </a:spcBef>
+              <a:spcAft>
+                <a:spcPts val="0"/>
+              </a:spcAft>
+              <a:buSzPct val="111111"/>
+              <a:buNone/>
+            </a:pPr>
+            <a:r>
+              <a:rPr lang="es-419"/>
+              <a:t>Coeficiente de correlación de Pearson</a:t>
+            </a:r>
+            <a:endParaRPr/>
+          </a:p>
+          <a:p>
+            <a:pPr indent="0" lvl="0" marL="0" rtl="0" algn="l">
+              <a:lnSpc>
+                <a:spcPct val="100000"/>
+              </a:lnSpc>
+              <a:spcBef>
+                <a:spcPts val="0"/>
+              </a:spcBef>
+              <a:spcAft>
+                <a:spcPts val="0"/>
+              </a:spcAft>
+              <a:buSzPct val="111111"/>
+              <a:buNone/>
+            </a:pPr>
+            <a:r>
+              <a:t/>
+            </a:r>
+            <a:endParaRPr/>
+          </a:p>
+        </p:txBody>
+      </p:sp>
+      <p:pic>
+        <p:nvPicPr>
+          <p:cNvPr id="220" name="Google Shape;220;g395883b0ceb_2_14"/>
+          <p:cNvPicPr preferRelativeResize="0"/>
+          <p:nvPr/>
+        </p:nvPicPr>
+        <p:blipFill rotWithShape="1">
+          <a:blip r:embed="rId3">
+            <a:alphaModFix/>
+          </a:blip>
+          <a:srcRect b="0" l="0" r="0" t="0"/>
+          <a:stretch/>
+        </p:blipFill>
+        <p:spPr>
+          <a:xfrm>
+            <a:off x="1179549" y="1958250"/>
+            <a:ext cx="6788501" cy="2979125"/>
           </a:xfrm>
           <a:prstGeom prst="rect">
             <a:avLst/>
@@ -16243,126 +16697,7 @@
   <p:cSld>
     <p:spTree>
       <p:nvGrpSpPr>
-        <p:cNvPr id="217" name="Shape 217"/>
-        <p:cNvGrpSpPr/>
-        <p:nvPr/>
-      </p:nvGrpSpPr>
-      <p:grpSpPr>
-        <a:xfrm>
-          <a:off x="0" y="0"/>
-          <a:ext cx="0" cy="0"/>
-          <a:chOff x="0" y="0"/>
-          <a:chExt cx="0" cy="0"/>
-        </a:xfrm>
-      </p:grpSpPr>
-      <p:sp>
-        <p:nvSpPr>
-          <p:cNvPr id="218" name="Google Shape;218;g395883b0ceb_2_14"/>
-          <p:cNvSpPr txBox="1"/>
-          <p:nvPr>
-            <p:ph type="title"/>
-          </p:nvPr>
-        </p:nvSpPr>
-        <p:spPr>
-          <a:xfrm>
-            <a:off x="729450" y="1318650"/>
-            <a:ext cx="7688700" cy="535200"/>
-          </a:xfrm>
-          <a:prstGeom prst="rect">
-            <a:avLst/>
-          </a:prstGeom>
-          <a:noFill/>
-          <a:ln>
-            <a:noFill/>
-          </a:ln>
-        </p:spPr>
-        <p:txBody>
-          <a:bodyPr anchorCtr="0" anchor="t" bIns="91425" lIns="91425" spcFirstLastPara="1" rIns="91425" wrap="square" tIns="91425">
-            <a:normAutofit fontScale="90000"/>
-          </a:bodyPr>
-          <a:lstStyle/>
-          <a:p>
-            <a:pPr indent="0" lvl="0" marL="0" rtl="0" algn="l">
-              <a:lnSpc>
-                <a:spcPct val="100000"/>
-              </a:lnSpc>
-              <a:spcBef>
-                <a:spcPts val="0"/>
-              </a:spcBef>
-              <a:spcAft>
-                <a:spcPts val="0"/>
-              </a:spcAft>
-              <a:buSzPct val="111111"/>
-              <a:buNone/>
-            </a:pPr>
-            <a:r>
-              <a:rPr lang="es-419"/>
-              <a:t>Coeficiente de correlación de Pearson</a:t>
-            </a:r>
-            <a:endParaRPr/>
-          </a:p>
-          <a:p>
-            <a:pPr indent="0" lvl="0" marL="0" rtl="0" algn="l">
-              <a:lnSpc>
-                <a:spcPct val="100000"/>
-              </a:lnSpc>
-              <a:spcBef>
-                <a:spcPts val="0"/>
-              </a:spcBef>
-              <a:spcAft>
-                <a:spcPts val="0"/>
-              </a:spcAft>
-              <a:buSzPct val="111111"/>
-              <a:buNone/>
-            </a:pPr>
-            <a:r>
-              <a:t/>
-            </a:r>
-            <a:endParaRPr/>
-          </a:p>
-        </p:txBody>
-      </p:sp>
-      <p:pic>
-        <p:nvPicPr>
-          <p:cNvPr id="219" name="Google Shape;219;g395883b0ceb_2_14"/>
-          <p:cNvPicPr preferRelativeResize="0"/>
-          <p:nvPr/>
-        </p:nvPicPr>
-        <p:blipFill rotWithShape="1">
-          <a:blip r:embed="rId3">
-            <a:alphaModFix/>
-          </a:blip>
-          <a:srcRect b="0" l="0" r="0" t="0"/>
-          <a:stretch/>
-        </p:blipFill>
-        <p:spPr>
-          <a:xfrm>
-            <a:off x="1179549" y="1958250"/>
-            <a:ext cx="6788501" cy="2979125"/>
-          </a:xfrm>
-          <a:prstGeom prst="rect">
-            <a:avLst/>
-          </a:prstGeom>
-          <a:noFill/>
-          <a:ln>
-            <a:noFill/>
-          </a:ln>
-        </p:spPr>
-      </p:pic>
-    </p:spTree>
-  </p:cSld>
-  <p:clrMapOvr>
-    <a:masterClrMapping/>
-  </p:clrMapOvr>
-</p:sld>
-</file>
-
-<file path=ppt/slides/slide21.xml><?xml version="1.0" encoding="utf-8"?>
-<p:sld xmlns:a="http://schemas.openxmlformats.org/drawingml/2006/main" xmlns:r="http://schemas.openxmlformats.org/officeDocument/2006/relationships" xmlns:mc="http://schemas.openxmlformats.org/markup-compatibility/2006" xmlns:mv="urn:schemas-microsoft-com:mac:vml" xmlns:p="http://schemas.openxmlformats.org/presentationml/2006/main" xmlns:c="http://schemas.openxmlformats.org/drawingml/2006/chart" xmlns:dgm="http://schemas.openxmlformats.org/drawingml/2006/diagram" xmlns:o="urn:schemas-microsoft-com:office:office" xmlns:v="urn:schemas-microsoft-com:vml" xmlns:pvml="urn:schemas-microsoft-com:office:powerpoint" xmlns:com="http://schemas.openxmlformats.org/drawingml/2006/compatibility" xmlns:p14="http://schemas.microsoft.com/office/powerpoint/2010/main" xmlns:p15="http://schemas.microsoft.com/office/powerpoint/2012/main" xmlns:ahyp="http://schemas.microsoft.com/office/drawing/2018/hyperlinkcolor">
-  <p:cSld>
-    <p:spTree>
-      <p:nvGrpSpPr>
-        <p:cNvPr id="223" name="Shape 223"/>
+        <p:cNvPr id="224" name="Shape 224"/>
         <p:cNvGrpSpPr/>
         <p:nvPr/>
       </p:nvGrpSpPr>
@@ -16376,7 +16711,7 @@
       </p:grpSpPr>
       <p:pic>
         <p:nvPicPr>
-          <p:cNvPr id="224" name="Google Shape;224;g395883b0ceb_2_96"/>
+          <p:cNvPr id="225" name="Google Shape;225;g395883b0ceb_2_96"/>
           <p:cNvPicPr preferRelativeResize="0"/>
           <p:nvPr/>
         </p:nvPicPr>
@@ -16877,450 +17212,7 @@
       </p:grpSpPr>
       <p:sp>
         <p:nvSpPr>
-          <p:cNvPr id="113" name="Google Shape;113;p5"/>
-          <p:cNvSpPr txBox="1"/>
-          <p:nvPr>
-            <p:ph type="title"/>
-          </p:nvPr>
-        </p:nvSpPr>
-        <p:spPr>
-          <a:xfrm>
-            <a:off x="730000" y="1318650"/>
-            <a:ext cx="3300900" cy="1687200"/>
-          </a:xfrm>
-          <a:prstGeom prst="rect">
-            <a:avLst/>
-          </a:prstGeom>
-          <a:noFill/>
-          <a:ln>
-            <a:noFill/>
-          </a:ln>
-        </p:spPr>
-        <p:txBody>
-          <a:bodyPr anchorCtr="0" anchor="t" bIns="91425" lIns="91425" spcFirstLastPara="1" rIns="91425" wrap="square" tIns="91425">
-            <a:normAutofit/>
-          </a:bodyPr>
-          <a:lstStyle/>
-          <a:p>
-            <a:pPr indent="0" lvl="0" marL="0" rtl="0" algn="l">
-              <a:lnSpc>
-                <a:spcPct val="100000"/>
-              </a:lnSpc>
-              <a:spcBef>
-                <a:spcPts val="0"/>
-              </a:spcBef>
-              <a:spcAft>
-                <a:spcPts val="0"/>
-              </a:spcAft>
-              <a:buSzPts val="2600"/>
-              <a:buNone/>
-            </a:pPr>
-            <a:r>
-              <a:rPr lang="es-419"/>
-              <a:t>Ley de Hooke</a:t>
-            </a:r>
-            <a:endParaRPr/>
-          </a:p>
-        </p:txBody>
-      </p:sp>
-      <p:sp>
-        <p:nvSpPr>
-          <p:cNvPr id="114" name="Google Shape;114;p5"/>
-          <p:cNvSpPr txBox="1"/>
-          <p:nvPr>
-            <p:ph idx="2" type="body"/>
-          </p:nvPr>
-        </p:nvSpPr>
-        <p:spPr>
-          <a:xfrm>
-            <a:off x="5174225" y="1352625"/>
-            <a:ext cx="3374400" cy="3025500"/>
-          </a:xfrm>
-          <a:prstGeom prst="rect">
-            <a:avLst/>
-          </a:prstGeom>
-          <a:noFill/>
-          <a:ln>
-            <a:noFill/>
-          </a:ln>
-        </p:spPr>
-        <p:txBody>
-          <a:bodyPr anchorCtr="0" anchor="t" bIns="91425" lIns="91425" spcFirstLastPara="1" rIns="91425" wrap="square" tIns="91425">
-            <a:normAutofit/>
-          </a:bodyPr>
-          <a:lstStyle/>
-          <a:p>
-            <a:pPr indent="0" lvl="0" marL="0" rtl="0" algn="l">
-              <a:lnSpc>
-                <a:spcPct val="115000"/>
-              </a:lnSpc>
-              <a:spcBef>
-                <a:spcPts val="0"/>
-              </a:spcBef>
-              <a:spcAft>
-                <a:spcPts val="1200"/>
-              </a:spcAft>
-              <a:buSzPts val="1300"/>
-              <a:buNone/>
-            </a:pPr>
-            <a:r>
-              <a:t/>
-            </a:r>
-            <a:endParaRPr/>
-          </a:p>
-        </p:txBody>
-      </p:sp>
-      <p:pic>
-        <p:nvPicPr>
-          <p:cNvPr id="115" name="Google Shape;115;p5"/>
-          <p:cNvPicPr preferRelativeResize="0"/>
-          <p:nvPr/>
-        </p:nvPicPr>
-        <p:blipFill rotWithShape="1">
-          <a:blip r:embed="rId3">
-            <a:alphaModFix/>
-          </a:blip>
-          <a:srcRect b="0" l="0" r="0" t="0"/>
-          <a:stretch/>
-        </p:blipFill>
-        <p:spPr>
-          <a:xfrm>
-            <a:off x="4712600" y="495337"/>
-            <a:ext cx="3992376" cy="4152826"/>
-          </a:xfrm>
-          <a:prstGeom prst="rect">
-            <a:avLst/>
-          </a:prstGeom>
-          <a:noFill/>
-          <a:ln>
-            <a:noFill/>
-          </a:ln>
-        </p:spPr>
-      </p:pic>
-      <p:sp>
-        <p:nvSpPr>
-          <p:cNvPr id="116" name="Google Shape;116;p5"/>
-          <p:cNvSpPr txBox="1"/>
-          <p:nvPr>
-            <p:ph idx="1" type="subTitle"/>
-          </p:nvPr>
-        </p:nvSpPr>
-        <p:spPr>
-          <a:xfrm>
-            <a:off x="724950" y="3161525"/>
-            <a:ext cx="3300900" cy="759000"/>
-          </a:xfrm>
-          <a:prstGeom prst="rect">
-            <a:avLst/>
-          </a:prstGeom>
-          <a:noFill/>
-          <a:ln>
-            <a:noFill/>
-          </a:ln>
-        </p:spPr>
-        <p:txBody>
-          <a:bodyPr anchorCtr="0" anchor="t" bIns="91425" lIns="91425" spcFirstLastPara="1" rIns="91425" wrap="square" tIns="91425">
-            <a:normAutofit/>
-          </a:bodyPr>
-          <a:lstStyle/>
-          <a:p>
-            <a:pPr indent="0" lvl="0" marL="0" rtl="0" algn="l">
-              <a:lnSpc>
-                <a:spcPct val="100000"/>
-              </a:lnSpc>
-              <a:spcBef>
-                <a:spcPts val="0"/>
-              </a:spcBef>
-              <a:spcAft>
-                <a:spcPts val="0"/>
-              </a:spcAft>
-              <a:buSzPts val="1600"/>
-              <a:buNone/>
-            </a:pPr>
-            <a:r>
-              <a:rPr lang="es-419"/>
-              <a:t>f = -k x</a:t>
-            </a:r>
-            <a:endParaRPr/>
-          </a:p>
-        </p:txBody>
-      </p:sp>
-    </p:spTree>
-  </p:cSld>
-  <p:clrMapOvr>
-    <a:masterClrMapping/>
-  </p:clrMapOvr>
-</p:sld>
-</file>
-
-<file path=ppt/slides/slide6.xml><?xml version="1.0" encoding="utf-8"?>
-<p:sld xmlns:a="http://schemas.openxmlformats.org/drawingml/2006/main" xmlns:r="http://schemas.openxmlformats.org/officeDocument/2006/relationships" xmlns:mc="http://schemas.openxmlformats.org/markup-compatibility/2006" xmlns:mv="urn:schemas-microsoft-com:mac:vml" xmlns:p="http://schemas.openxmlformats.org/presentationml/2006/main" xmlns:c="http://schemas.openxmlformats.org/drawingml/2006/chart" xmlns:dgm="http://schemas.openxmlformats.org/drawingml/2006/diagram" xmlns:o="urn:schemas-microsoft-com:office:office" xmlns:v="urn:schemas-microsoft-com:vml" xmlns:pvml="urn:schemas-microsoft-com:office:powerpoint" xmlns:com="http://schemas.openxmlformats.org/drawingml/2006/compatibility" xmlns:p14="http://schemas.microsoft.com/office/powerpoint/2010/main" xmlns:p15="http://schemas.microsoft.com/office/powerpoint/2012/main" xmlns:ahyp="http://schemas.microsoft.com/office/drawing/2018/hyperlinkcolor">
-  <p:cSld>
-    <p:spTree>
-      <p:nvGrpSpPr>
-        <p:cNvPr id="120" name="Shape 120"/>
-        <p:cNvGrpSpPr/>
-        <p:nvPr/>
-      </p:nvGrpSpPr>
-      <p:grpSpPr>
-        <a:xfrm>
-          <a:off x="0" y="0"/>
-          <a:ext cx="0" cy="0"/>
-          <a:chOff x="0" y="0"/>
-          <a:chExt cx="0" cy="0"/>
-        </a:xfrm>
-      </p:grpSpPr>
-      <p:sp>
-        <p:nvSpPr>
-          <p:cNvPr id="121" name="Google Shape;121;p6"/>
-          <p:cNvSpPr txBox="1"/>
-          <p:nvPr>
-            <p:ph type="title"/>
-          </p:nvPr>
-        </p:nvSpPr>
-        <p:spPr>
-          <a:xfrm>
-            <a:off x="730000" y="1318650"/>
-            <a:ext cx="3300900" cy="1687200"/>
-          </a:xfrm>
-          <a:prstGeom prst="rect">
-            <a:avLst/>
-          </a:prstGeom>
-          <a:noFill/>
-          <a:ln>
-            <a:noFill/>
-          </a:ln>
-        </p:spPr>
-        <p:txBody>
-          <a:bodyPr anchorCtr="0" anchor="t" bIns="91425" lIns="91425" spcFirstLastPara="1" rIns="91425" wrap="square" tIns="91425">
-            <a:normAutofit/>
-          </a:bodyPr>
-          <a:lstStyle/>
-          <a:p>
-            <a:pPr indent="0" lvl="0" marL="0" rtl="0" algn="l">
-              <a:lnSpc>
-                <a:spcPct val="100000"/>
-              </a:lnSpc>
-              <a:spcBef>
-                <a:spcPts val="0"/>
-              </a:spcBef>
-              <a:spcAft>
-                <a:spcPts val="0"/>
-              </a:spcAft>
-              <a:buSzPts val="2600"/>
-              <a:buNone/>
-            </a:pPr>
-            <a:r>
-              <a:rPr lang="es-419"/>
-              <a:t>Movimiento Rectilíneo Uniforme Variado</a:t>
-            </a:r>
-            <a:endParaRPr/>
-          </a:p>
-        </p:txBody>
-      </p:sp>
-      <p:sp>
-        <p:nvSpPr>
-          <p:cNvPr id="122" name="Google Shape;122;p6"/>
-          <p:cNvSpPr txBox="1"/>
-          <p:nvPr>
-            <p:ph idx="1" type="subTitle"/>
-          </p:nvPr>
-        </p:nvSpPr>
-        <p:spPr>
-          <a:xfrm>
-            <a:off x="724950" y="3161525"/>
-            <a:ext cx="3300900" cy="759000"/>
-          </a:xfrm>
-          <a:prstGeom prst="rect">
-            <a:avLst/>
-          </a:prstGeom>
-          <a:noFill/>
-          <a:ln>
-            <a:noFill/>
-          </a:ln>
-        </p:spPr>
-        <p:txBody>
-          <a:bodyPr anchorCtr="0" anchor="t" bIns="91425" lIns="91425" spcFirstLastPara="1" rIns="91425" wrap="square" tIns="91425">
-            <a:normAutofit fontScale="92500" lnSpcReduction="20000"/>
-          </a:bodyPr>
-          <a:lstStyle/>
-          <a:p>
-            <a:pPr indent="0" lvl="0" marL="0" rtl="0" algn="l">
-              <a:lnSpc>
-                <a:spcPct val="100000"/>
-              </a:lnSpc>
-              <a:spcBef>
-                <a:spcPts val="0"/>
-              </a:spcBef>
-              <a:spcAft>
-                <a:spcPts val="0"/>
-              </a:spcAft>
-              <a:buSzPct val="108108"/>
-              <a:buNone/>
-            </a:pPr>
-            <a:r>
-              <a:rPr lang="es-419"/>
-              <a:t>v(t) = v(t0) + a * t</a:t>
-            </a:r>
-            <a:endParaRPr/>
-          </a:p>
-          <a:p>
-            <a:pPr indent="0" lvl="0" marL="0" rtl="0" algn="l">
-              <a:lnSpc>
-                <a:spcPct val="100000"/>
-              </a:lnSpc>
-              <a:spcBef>
-                <a:spcPts val="0"/>
-              </a:spcBef>
-              <a:spcAft>
-                <a:spcPts val="0"/>
-              </a:spcAft>
-              <a:buSzPct val="108108"/>
-              <a:buNone/>
-            </a:pPr>
-            <a:r>
-              <a:t/>
-            </a:r>
-            <a:endParaRPr/>
-          </a:p>
-          <a:p>
-            <a:pPr indent="0" lvl="0" marL="0" rtl="0" algn="l">
-              <a:lnSpc>
-                <a:spcPct val="100000"/>
-              </a:lnSpc>
-              <a:spcBef>
-                <a:spcPts val="0"/>
-              </a:spcBef>
-              <a:spcAft>
-                <a:spcPts val="0"/>
-              </a:spcAft>
-              <a:buSzPct val="108108"/>
-              <a:buNone/>
-            </a:pPr>
-            <a:r>
-              <a:rPr lang="es-419"/>
-              <a:t>x(t) = x(t0) + v(t0)*t + 0.5 a t</a:t>
-            </a:r>
-            <a:r>
-              <a:rPr baseline="30000" lang="es-419"/>
-              <a:t>2</a:t>
-            </a:r>
-            <a:endParaRPr baseline="30000"/>
-          </a:p>
-        </p:txBody>
-      </p:sp>
-      <p:pic>
-        <p:nvPicPr>
-          <p:cNvPr id="123" name="Google Shape;123;p6"/>
-          <p:cNvPicPr preferRelativeResize="0"/>
-          <p:nvPr/>
-        </p:nvPicPr>
-        <p:blipFill rotWithShape="1">
-          <a:blip r:embed="rId3">
-            <a:alphaModFix/>
-          </a:blip>
-          <a:srcRect b="0" l="0" r="0" t="0"/>
-          <a:stretch/>
-        </p:blipFill>
-        <p:spPr>
-          <a:xfrm>
-            <a:off x="5465671" y="0"/>
-            <a:ext cx="3011259" cy="5143501"/>
-          </a:xfrm>
-          <a:prstGeom prst="rect">
-            <a:avLst/>
-          </a:prstGeom>
-          <a:noFill/>
-          <a:ln>
-            <a:noFill/>
-          </a:ln>
-        </p:spPr>
-      </p:pic>
-      <p:sp>
-        <p:nvSpPr>
-          <p:cNvPr id="124" name="Google Shape;124;p6"/>
-          <p:cNvSpPr txBox="1"/>
-          <p:nvPr/>
-        </p:nvSpPr>
-        <p:spPr>
-          <a:xfrm>
-            <a:off x="4311250" y="2219350"/>
-            <a:ext cx="1769400" cy="37500"/>
-          </a:xfrm>
-          <a:prstGeom prst="rect">
-            <a:avLst/>
-          </a:prstGeom>
-          <a:noFill/>
-          <a:ln>
-            <a:noFill/>
-          </a:ln>
-        </p:spPr>
-        <p:txBody>
-          <a:bodyPr anchorCtr="0" anchor="t" bIns="91425" lIns="91425" spcFirstLastPara="1" rIns="91425" wrap="square" tIns="91425">
-            <a:noAutofit/>
-          </a:bodyPr>
-          <a:lstStyle/>
-          <a:p>
-            <a:pPr indent="0" lvl="0" marL="0" marR="0" rtl="0" algn="l">
-              <a:lnSpc>
-                <a:spcPct val="100000"/>
-              </a:lnSpc>
-              <a:spcBef>
-                <a:spcPts val="0"/>
-              </a:spcBef>
-              <a:spcAft>
-                <a:spcPts val="0"/>
-              </a:spcAft>
-              <a:buClr>
-                <a:srgbClr val="000000"/>
-              </a:buClr>
-              <a:buSzPts val="1400"/>
-              <a:buFont typeface="Arial"/>
-              <a:buNone/>
-            </a:pPr>
-            <a:r>
-              <a:t/>
-            </a:r>
-            <a:endParaRPr b="0" i="0" sz="1400" u="none" cap="none" strike="noStrike">
-              <a:solidFill>
-                <a:srgbClr val="000000"/>
-              </a:solidFill>
-              <a:latin typeface="Lato"/>
-              <a:ea typeface="Lato"/>
-              <a:cs typeface="Lato"/>
-              <a:sym typeface="Lato"/>
-            </a:endParaRPr>
-          </a:p>
-        </p:txBody>
-      </p:sp>
-    </p:spTree>
-  </p:cSld>
-  <p:clrMapOvr>
-    <a:masterClrMapping/>
-  </p:clrMapOvr>
-</p:sld>
-</file>
-
-<file path=ppt/slides/slide7.xml><?xml version="1.0" encoding="utf-8"?>
-<p:sld xmlns:a="http://schemas.openxmlformats.org/drawingml/2006/main" xmlns:r="http://schemas.openxmlformats.org/officeDocument/2006/relationships" xmlns:mc="http://schemas.openxmlformats.org/markup-compatibility/2006" xmlns:mv="urn:schemas-microsoft-com:mac:vml" xmlns:p="http://schemas.openxmlformats.org/presentationml/2006/main" xmlns:c="http://schemas.openxmlformats.org/drawingml/2006/chart" xmlns:dgm="http://schemas.openxmlformats.org/drawingml/2006/diagram" xmlns:o="urn:schemas-microsoft-com:office:office" xmlns:v="urn:schemas-microsoft-com:vml" xmlns:pvml="urn:schemas-microsoft-com:office:powerpoint" xmlns:com="http://schemas.openxmlformats.org/drawingml/2006/compatibility" xmlns:p14="http://schemas.microsoft.com/office/powerpoint/2010/main" xmlns:p15="http://schemas.microsoft.com/office/powerpoint/2012/main" xmlns:ahyp="http://schemas.microsoft.com/office/drawing/2018/hyperlinkcolor">
-  <p:cSld>
-    <p:spTree>
-      <p:nvGrpSpPr>
-        <p:cNvPr id="128" name="Shape 128"/>
-        <p:cNvGrpSpPr/>
-        <p:nvPr/>
-      </p:nvGrpSpPr>
-      <p:grpSpPr>
-        <a:xfrm>
-          <a:off x="0" y="0"/>
-          <a:ext cx="0" cy="0"/>
-          <a:chOff x="0" y="0"/>
-          <a:chExt cx="0" cy="0"/>
-        </a:xfrm>
-      </p:grpSpPr>
-      <p:sp>
-        <p:nvSpPr>
-          <p:cNvPr id="129" name="Google Shape;129;p7"/>
+          <p:cNvPr id="113" name="Google Shape;113;p7"/>
           <p:cNvSpPr txBox="1"/>
           <p:nvPr>
             <p:ph type="title"/>
@@ -17360,7 +17252,7 @@
             </a:pPr>
             <a:r>
               <a:rPr lang="es-419"/>
-              <a:t>Regresión Lineal</a:t>
+              <a:t>¿Qué significa "buscar la mejor recta"? </a:t>
             </a:r>
             <a:endParaRPr/>
           </a:p>
@@ -17368,7 +17260,7 @@
       </p:sp>
       <p:sp>
         <p:nvSpPr>
-          <p:cNvPr id="130" name="Google Shape;130;p7"/>
+          <p:cNvPr id="114" name="Google Shape;114;p7"/>
           <p:cNvSpPr txBox="1"/>
           <p:nvPr>
             <p:ph idx="1" type="body"/>
@@ -17376,8 +17268,8 @@
         </p:nvSpPr>
         <p:spPr>
           <a:xfrm>
-            <a:off x="729450" y="2078875"/>
-            <a:ext cx="7688700" cy="2261100"/>
+            <a:off x="729450" y="1797300"/>
+            <a:ext cx="4518300" cy="2261100"/>
           </a:xfrm>
           <a:prstGeom prst="rect">
             <a:avLst/>
@@ -17389,7 +17281,7 @@
         </p:spPr>
         <p:txBody>
           <a:bodyPr anchorCtr="0" anchor="t" bIns="91425" lIns="91425" spcFirstLastPara="1" rIns="91425" wrap="square" tIns="91425">
-            <a:normAutofit/>
+            <a:normAutofit fontScale="85000" lnSpcReduction="20000"/>
           </a:bodyPr>
           <a:lstStyle/>
           <a:p>
@@ -17403,7 +17295,7 @@
               <a:spcAft>
                 <a:spcPts val="0"/>
               </a:spcAft>
-              <a:buSzPts val="1300"/>
+              <a:buSzPct val="100000"/>
               <a:buNone/>
             </a:pPr>
             <a:r>
@@ -17447,7 +17339,7 @@
               <a:spcAft>
                 <a:spcPts val="0"/>
               </a:spcAft>
-              <a:buSzPts val="1300"/>
+              <a:buSzPct val="100000"/>
               <a:buNone/>
             </a:pPr>
             <a:r>
@@ -17467,7 +17359,7 @@
               <a:spcAft>
                 <a:spcPts val="0"/>
               </a:spcAft>
-              <a:buSzPts val="1300"/>
+              <a:buSzPct val="100000"/>
               <a:buNone/>
             </a:pPr>
             <a:r>
@@ -17491,7 +17383,7 @@
               <a:spcAft>
                 <a:spcPts val="0"/>
               </a:spcAft>
-              <a:buSzPts val="1300"/>
+              <a:buSzPct val="100000"/>
               <a:buNone/>
             </a:pPr>
             <a:r>
@@ -17515,7 +17407,7 @@
               <a:spcAft>
                 <a:spcPts val="1200"/>
               </a:spcAft>
-              <a:buSzPts val="1300"/>
+              <a:buSzPct val="100000"/>
               <a:buNone/>
             </a:pPr>
             <a:r>
@@ -17526,6 +17418,33 @@
           </a:p>
         </p:txBody>
       </p:sp>
+      <p:pic>
+        <p:nvPicPr>
+          <p:cNvPr id="115" name="Google Shape;115;p7"/>
+          <p:cNvPicPr preferRelativeResize="0"/>
+          <p:nvPr/>
+        </p:nvPicPr>
+        <p:blipFill rotWithShape="1">
+          <a:blip r:embed="rId3">
+            <a:alphaModFix/>
+          </a:blip>
+          <a:srcRect b="0" l="0" r="0" t="0"/>
+          <a:stretch/>
+        </p:blipFill>
+        <p:spPr>
+          <a:xfrm>
+            <a:off x="5081850" y="1797300"/>
+            <a:ext cx="3884825" cy="2400500"/>
+          </a:xfrm>
+          <a:prstGeom prst="rect">
+            <a:avLst/>
+          </a:prstGeom>
+          <a:noFill/>
+          <a:ln>
+            <a:noFill/>
+          </a:ln>
+        </p:spPr>
+      </p:pic>
     </p:spTree>
   </p:cSld>
   <p:clrMapOvr>
@@ -17534,12 +17453,12 @@
 </p:sld>
 </file>
 
-<file path=ppt/slides/slide8.xml><?xml version="1.0" encoding="utf-8"?>
+<file path=ppt/slides/slide6.xml><?xml version="1.0" encoding="utf-8"?>
 <p:sld xmlns:a="http://schemas.openxmlformats.org/drawingml/2006/main" xmlns:r="http://schemas.openxmlformats.org/officeDocument/2006/relationships" xmlns:mc="http://schemas.openxmlformats.org/markup-compatibility/2006" xmlns:mv="urn:schemas-microsoft-com:mac:vml" xmlns:p="http://schemas.openxmlformats.org/presentationml/2006/main" xmlns:c="http://schemas.openxmlformats.org/drawingml/2006/chart" xmlns:dgm="http://schemas.openxmlformats.org/drawingml/2006/diagram" xmlns:o="urn:schemas-microsoft-com:office:office" xmlns:v="urn:schemas-microsoft-com:vml" xmlns:pvml="urn:schemas-microsoft-com:office:powerpoint" xmlns:com="http://schemas.openxmlformats.org/drawingml/2006/compatibility" xmlns:p14="http://schemas.microsoft.com/office/powerpoint/2010/main" xmlns:p15="http://schemas.microsoft.com/office/powerpoint/2012/main" xmlns:ahyp="http://schemas.microsoft.com/office/drawing/2018/hyperlinkcolor">
   <p:cSld>
     <p:spTree>
       <p:nvGrpSpPr>
-        <p:cNvPr id="134" name="Shape 134"/>
+        <p:cNvPr id="119" name="Shape 119"/>
         <p:cNvGrpSpPr/>
         <p:nvPr/>
       </p:nvGrpSpPr>
@@ -17553,7 +17472,7 @@
       </p:grpSpPr>
       <p:sp>
         <p:nvSpPr>
-          <p:cNvPr id="135" name="Google Shape;135;p8"/>
+          <p:cNvPr id="120" name="Google Shape;120;p8"/>
           <p:cNvSpPr txBox="1"/>
           <p:nvPr>
             <p:ph type="title"/>
@@ -17601,7 +17520,7 @@
       </p:sp>
       <p:sp>
         <p:nvSpPr>
-          <p:cNvPr id="136" name="Google Shape;136;p8"/>
+          <p:cNvPr id="121" name="Google Shape;121;p8"/>
           <p:cNvSpPr txBox="1"/>
           <p:nvPr>
             <p:ph idx="1" type="body"/>
@@ -17888,12 +17807,12 @@
 </p:sld>
 </file>
 
-<file path=ppt/slides/slide9.xml><?xml version="1.0" encoding="utf-8"?>
+<file path=ppt/slides/slide7.xml><?xml version="1.0" encoding="utf-8"?>
 <p:sld xmlns:a="http://schemas.openxmlformats.org/drawingml/2006/main" xmlns:r="http://schemas.openxmlformats.org/officeDocument/2006/relationships" xmlns:mc="http://schemas.openxmlformats.org/markup-compatibility/2006" xmlns:mv="urn:schemas-microsoft-com:mac:vml" xmlns:p="http://schemas.openxmlformats.org/presentationml/2006/main" xmlns:c="http://schemas.openxmlformats.org/drawingml/2006/chart" xmlns:dgm="http://schemas.openxmlformats.org/drawingml/2006/diagram" xmlns:o="urn:schemas-microsoft-com:office:office" xmlns:v="urn:schemas-microsoft-com:vml" xmlns:pvml="urn:schemas-microsoft-com:office:powerpoint" xmlns:com="http://schemas.openxmlformats.org/drawingml/2006/compatibility" xmlns:p14="http://schemas.microsoft.com/office/powerpoint/2010/main" xmlns:p15="http://schemas.microsoft.com/office/powerpoint/2012/main" xmlns:ahyp="http://schemas.microsoft.com/office/drawing/2018/hyperlinkcolor">
   <p:cSld>
     <p:spTree>
       <p:nvGrpSpPr>
-        <p:cNvPr id="140" name="Shape 140"/>
+        <p:cNvPr id="125" name="Shape 125"/>
         <p:cNvGrpSpPr/>
         <p:nvPr/>
       </p:nvGrpSpPr>
@@ -17907,7 +17826,7 @@
       </p:grpSpPr>
       <p:sp>
         <p:nvSpPr>
-          <p:cNvPr id="141" name="Google Shape;141;p9"/>
+          <p:cNvPr id="126" name="Google Shape;126;p9"/>
           <p:cNvSpPr txBox="1"/>
           <p:nvPr>
             <p:ph idx="1" type="body"/>
@@ -18129,7 +18048,7 @@
       </p:sp>
       <p:pic>
         <p:nvPicPr>
-          <p:cNvPr id="142" name="Google Shape;142;p9"/>
+          <p:cNvPr id="127" name="Google Shape;127;p9"/>
           <p:cNvPicPr preferRelativeResize="0"/>
           <p:nvPr/>
         </p:nvPicPr>
@@ -18144,6 +18063,166 @@
           <a:xfrm>
             <a:off x="2368763" y="3346475"/>
             <a:ext cx="4410075" cy="257175"/>
+          </a:xfrm>
+          <a:prstGeom prst="rect">
+            <a:avLst/>
+          </a:prstGeom>
+          <a:noFill/>
+          <a:ln>
+            <a:noFill/>
+          </a:ln>
+        </p:spPr>
+      </p:pic>
+    </p:spTree>
+  </p:cSld>
+  <p:clrMapOvr>
+    <a:masterClrMapping/>
+  </p:clrMapOvr>
+</p:sld>
+</file>
+
+<file path=ppt/slides/slide8.xml><?xml version="1.0" encoding="utf-8"?>
+<p:sld xmlns:a="http://schemas.openxmlformats.org/drawingml/2006/main" xmlns:r="http://schemas.openxmlformats.org/officeDocument/2006/relationships" xmlns:mc="http://schemas.openxmlformats.org/markup-compatibility/2006" xmlns:mv="urn:schemas-microsoft-com:mac:vml" xmlns:p="http://schemas.openxmlformats.org/presentationml/2006/main" xmlns:c="http://schemas.openxmlformats.org/drawingml/2006/chart" xmlns:dgm="http://schemas.openxmlformats.org/drawingml/2006/diagram" xmlns:o="urn:schemas-microsoft-com:office:office" xmlns:v="urn:schemas-microsoft-com:vml" xmlns:pvml="urn:schemas-microsoft-com:office:powerpoint" xmlns:com="http://schemas.openxmlformats.org/drawingml/2006/compatibility" xmlns:p14="http://schemas.microsoft.com/office/powerpoint/2010/main" xmlns:p15="http://schemas.microsoft.com/office/powerpoint/2012/main" xmlns:ahyp="http://schemas.microsoft.com/office/drawing/2018/hyperlinkcolor">
+  <p:cSld>
+    <p:spTree>
+      <p:nvGrpSpPr>
+        <p:cNvPr id="131" name="Shape 131"/>
+        <p:cNvGrpSpPr/>
+        <p:nvPr/>
+      </p:nvGrpSpPr>
+      <p:grpSpPr>
+        <a:xfrm>
+          <a:off x="0" y="0"/>
+          <a:ext cx="0" cy="0"/>
+          <a:chOff x="0" y="0"/>
+          <a:chExt cx="0" cy="0"/>
+        </a:xfrm>
+      </p:grpSpPr>
+      <p:pic>
+        <p:nvPicPr>
+          <p:cNvPr id="132" name="Google Shape;132;p10"/>
+          <p:cNvPicPr preferRelativeResize="0"/>
+          <p:nvPr/>
+        </p:nvPicPr>
+        <p:blipFill rotWithShape="1">
+          <a:blip r:embed="rId3">
+            <a:alphaModFix/>
+          </a:blip>
+          <a:srcRect b="0" l="0" r="0" t="0"/>
+          <a:stretch/>
+        </p:blipFill>
+        <p:spPr>
+          <a:xfrm>
+            <a:off x="1833611" y="624075"/>
+            <a:ext cx="5476775" cy="4351850"/>
+          </a:xfrm>
+          <a:prstGeom prst="rect">
+            <a:avLst/>
+          </a:prstGeom>
+          <a:noFill/>
+          <a:ln>
+            <a:noFill/>
+          </a:ln>
+        </p:spPr>
+      </p:pic>
+    </p:spTree>
+  </p:cSld>
+  <p:clrMapOvr>
+    <a:masterClrMapping/>
+  </p:clrMapOvr>
+</p:sld>
+</file>
+
+<file path=ppt/slides/slide9.xml><?xml version="1.0" encoding="utf-8"?>
+<p:sld xmlns:a="http://schemas.openxmlformats.org/drawingml/2006/main" xmlns:r="http://schemas.openxmlformats.org/officeDocument/2006/relationships" xmlns:mc="http://schemas.openxmlformats.org/markup-compatibility/2006" xmlns:mv="urn:schemas-microsoft-com:mac:vml" xmlns:p="http://schemas.openxmlformats.org/presentationml/2006/main" xmlns:c="http://schemas.openxmlformats.org/drawingml/2006/chart" xmlns:dgm="http://schemas.openxmlformats.org/drawingml/2006/diagram" xmlns:o="urn:schemas-microsoft-com:office:office" xmlns:v="urn:schemas-microsoft-com:vml" xmlns:pvml="urn:schemas-microsoft-com:office:powerpoint" xmlns:com="http://schemas.openxmlformats.org/drawingml/2006/compatibility" xmlns:p14="http://schemas.microsoft.com/office/powerpoint/2010/main" xmlns:p15="http://schemas.microsoft.com/office/powerpoint/2012/main" xmlns:ahyp="http://schemas.microsoft.com/office/drawing/2018/hyperlinkcolor">
+  <p:cSld>
+    <p:spTree>
+      <p:nvGrpSpPr>
+        <p:cNvPr id="136" name="Shape 136"/>
+        <p:cNvGrpSpPr/>
+        <p:nvPr/>
+      </p:nvGrpSpPr>
+      <p:grpSpPr>
+        <a:xfrm>
+          <a:off x="0" y="0"/>
+          <a:ext cx="0" cy="0"/>
+          <a:chOff x="0" y="0"/>
+          <a:chExt cx="0" cy="0"/>
+        </a:xfrm>
+      </p:grpSpPr>
+      <p:pic>
+        <p:nvPicPr>
+          <p:cNvPr id="137" name="Google Shape;137;p11"/>
+          <p:cNvPicPr preferRelativeResize="0"/>
+          <p:nvPr/>
+        </p:nvPicPr>
+        <p:blipFill rotWithShape="1">
+          <a:blip r:embed="rId3">
+            <a:alphaModFix/>
+          </a:blip>
+          <a:srcRect b="0" l="0" r="0" t="0"/>
+          <a:stretch/>
+        </p:blipFill>
+        <p:spPr>
+          <a:xfrm>
+            <a:off x="276500" y="909963"/>
+            <a:ext cx="4667250" cy="3667125"/>
+          </a:xfrm>
+          <a:prstGeom prst="rect">
+            <a:avLst/>
+          </a:prstGeom>
+          <a:noFill/>
+          <a:ln>
+            <a:noFill/>
+          </a:ln>
+        </p:spPr>
+      </p:pic>
+      <p:pic>
+        <p:nvPicPr>
+          <p:cNvPr id="138" name="Google Shape;138;p11"/>
+          <p:cNvPicPr preferRelativeResize="0"/>
+          <p:nvPr/>
+        </p:nvPicPr>
+        <p:blipFill>
+          <a:blip r:embed="rId4">
+            <a:alphaModFix/>
+          </a:blip>
+          <a:stretch>
+            <a:fillRect/>
+          </a:stretch>
+        </p:blipFill>
+        <p:spPr>
+          <a:xfrm>
+            <a:off x="4726550" y="1415470"/>
+            <a:ext cx="4206475" cy="1563950"/>
+          </a:xfrm>
+          <a:prstGeom prst="rect">
+            <a:avLst/>
+          </a:prstGeom>
+          <a:noFill/>
+          <a:ln>
+            <a:noFill/>
+          </a:ln>
+        </p:spPr>
+      </p:pic>
+      <p:pic>
+        <p:nvPicPr>
+          <p:cNvPr id="139" name="Google Shape;139;p11"/>
+          <p:cNvPicPr preferRelativeResize="0"/>
+          <p:nvPr/>
+        </p:nvPicPr>
+        <p:blipFill>
+          <a:blip r:embed="rId5">
+            <a:alphaModFix/>
+          </a:blip>
+          <a:stretch>
+            <a:fillRect/>
+          </a:stretch>
+        </p:blipFill>
+        <p:spPr>
+          <a:xfrm>
+            <a:off x="4814520" y="3117545"/>
+            <a:ext cx="4030525" cy="1277725"/>
           </a:xfrm>
           <a:prstGeom prst="rect">
             <a:avLst/>
